--- a/electronics_sales_dashboard.pptx
+++ b/electronics_sales_dashboard.pptx
@@ -2,30 +2,34 @@
 <file path=ppt/presentation.xml><?xml version="1.0" encoding="utf-8"?>
 <p:presentation xmlns:a="http://schemas.openxmlformats.org/drawingml/2006/main" xmlns:r="http://schemas.openxmlformats.org/officeDocument/2006/relationships" xmlns:p="http://schemas.openxmlformats.org/presentationml/2006/main" saveSubsetFonts="1" autoCompressPictures="0">
   <p:sldMasterIdLst>
-    <p:sldMasterId id="2147483648" r:id="rId1"/>
+    <p:sldMasterId id="2147483663" r:id="rId1"/>
   </p:sldMasterIdLst>
   <p:notesMasterIdLst>
-    <p:notesMasterId r:id="rId15"/>
+    <p:notesMasterId r:id="rId16"/>
   </p:notesMasterIdLst>
   <p:sldIdLst>
     <p:sldId id="256" r:id="rId2"/>
     <p:sldId id="257" r:id="rId3"/>
-    <p:sldId id="259" r:id="rId4"/>
-    <p:sldId id="260" r:id="rId5"/>
-    <p:sldId id="261" r:id="rId6"/>
-    <p:sldId id="262" r:id="rId7"/>
-    <p:sldId id="263" r:id="rId8"/>
-    <p:sldId id="265" r:id="rId9"/>
-    <p:sldId id="266" r:id="rId10"/>
-    <p:sldId id="267" r:id="rId11"/>
-    <p:sldId id="268" r:id="rId12"/>
-    <p:sldId id="270" r:id="rId13"/>
-    <p:sldId id="271" r:id="rId14"/>
+    <p:sldId id="272" r:id="rId4"/>
+    <p:sldId id="259" r:id="rId5"/>
+    <p:sldId id="260" r:id="rId6"/>
+    <p:sldId id="261" r:id="rId7"/>
+    <p:sldId id="262" r:id="rId8"/>
+    <p:sldId id="263" r:id="rId9"/>
+    <p:sldId id="265" r:id="rId10"/>
+    <p:sldId id="266" r:id="rId11"/>
+    <p:sldId id="267" r:id="rId12"/>
+    <p:sldId id="268" r:id="rId13"/>
+    <p:sldId id="270" r:id="rId14"/>
+    <p:sldId id="271" r:id="rId15"/>
   </p:sldIdLst>
   <p:sldSz cx="9144000" cy="5143500" type="screen16x9"/>
   <p:notesSz cx="5143500" cy="9144000"/>
   <p:defaultTextStyle>
-    <a:lvl1pPr marL="0" algn="l" defTabSz="914400" rtl="0" eaLnBrk="1" latinLnBrk="0" hangingPunct="1">
+    <a:defPPr>
+      <a:defRPr lang="en-US"/>
+    </a:defPPr>
+    <a:lvl1pPr marL="0" algn="l" defTabSz="457200" rtl="0" eaLnBrk="1" latinLnBrk="0" hangingPunct="1">
       <a:defRPr sz="1800" kern="1200">
         <a:solidFill>
           <a:schemeClr val="tx1"/>
@@ -35,7 +39,7 @@
         <a:cs typeface="+mn-cs"/>
       </a:defRPr>
     </a:lvl1pPr>
-    <a:lvl2pPr marL="457200" algn="l" defTabSz="914400" rtl="0" eaLnBrk="1" latinLnBrk="0" hangingPunct="1">
+    <a:lvl2pPr marL="457200" algn="l" defTabSz="457200" rtl="0" eaLnBrk="1" latinLnBrk="0" hangingPunct="1">
       <a:defRPr sz="1800" kern="1200">
         <a:solidFill>
           <a:schemeClr val="tx1"/>
@@ -45,7 +49,7 @@
         <a:cs typeface="+mn-cs"/>
       </a:defRPr>
     </a:lvl2pPr>
-    <a:lvl3pPr marL="914400" algn="l" defTabSz="914400" rtl="0" eaLnBrk="1" latinLnBrk="0" hangingPunct="1">
+    <a:lvl3pPr marL="914400" algn="l" defTabSz="457200" rtl="0" eaLnBrk="1" latinLnBrk="0" hangingPunct="1">
       <a:defRPr sz="1800" kern="1200">
         <a:solidFill>
           <a:schemeClr val="tx1"/>
@@ -55,7 +59,7 @@
         <a:cs typeface="+mn-cs"/>
       </a:defRPr>
     </a:lvl3pPr>
-    <a:lvl4pPr marL="1371600" algn="l" defTabSz="914400" rtl="0" eaLnBrk="1" latinLnBrk="0" hangingPunct="1">
+    <a:lvl4pPr marL="1371600" algn="l" defTabSz="457200" rtl="0" eaLnBrk="1" latinLnBrk="0" hangingPunct="1">
       <a:defRPr sz="1800" kern="1200">
         <a:solidFill>
           <a:schemeClr val="tx1"/>
@@ -65,7 +69,7 @@
         <a:cs typeface="+mn-cs"/>
       </a:defRPr>
     </a:lvl4pPr>
-    <a:lvl5pPr marL="1828800" algn="l" defTabSz="914400" rtl="0" eaLnBrk="1" latinLnBrk="0" hangingPunct="1">
+    <a:lvl5pPr marL="1828800" algn="l" defTabSz="457200" rtl="0" eaLnBrk="1" latinLnBrk="0" hangingPunct="1">
       <a:defRPr sz="1800" kern="1200">
         <a:solidFill>
           <a:schemeClr val="tx1"/>
@@ -75,7 +79,7 @@
         <a:cs typeface="+mn-cs"/>
       </a:defRPr>
     </a:lvl5pPr>
-    <a:lvl6pPr marL="2286000" algn="l" defTabSz="914400" rtl="0" eaLnBrk="1" latinLnBrk="0" hangingPunct="1">
+    <a:lvl6pPr marL="2286000" algn="l" defTabSz="457200" rtl="0" eaLnBrk="1" latinLnBrk="0" hangingPunct="1">
       <a:defRPr sz="1800" kern="1200">
         <a:solidFill>
           <a:schemeClr val="tx1"/>
@@ -85,7 +89,7 @@
         <a:cs typeface="+mn-cs"/>
       </a:defRPr>
     </a:lvl6pPr>
-    <a:lvl7pPr marL="2743200" algn="l" defTabSz="914400" rtl="0" eaLnBrk="1" latinLnBrk="0" hangingPunct="1">
+    <a:lvl7pPr marL="2743200" algn="l" defTabSz="457200" rtl="0" eaLnBrk="1" latinLnBrk="0" hangingPunct="1">
       <a:defRPr sz="1800" kern="1200">
         <a:solidFill>
           <a:schemeClr val="tx1"/>
@@ -95,7 +99,7 @@
         <a:cs typeface="+mn-cs"/>
       </a:defRPr>
     </a:lvl7pPr>
-    <a:lvl8pPr marL="3200400" algn="l" defTabSz="914400" rtl="0" eaLnBrk="1" latinLnBrk="0" hangingPunct="1">
+    <a:lvl8pPr marL="3200400" algn="l" defTabSz="457200" rtl="0" eaLnBrk="1" latinLnBrk="0" hangingPunct="1">
       <a:defRPr sz="1800" kern="1200">
         <a:solidFill>
           <a:schemeClr val="tx1"/>
@@ -105,7 +109,7 @@
         <a:cs typeface="+mn-cs"/>
       </a:defRPr>
     </a:lvl8pPr>
-    <a:lvl9pPr marL="3657600" algn="l" defTabSz="914400" rtl="0" eaLnBrk="1" latinLnBrk="0" hangingPunct="1">
+    <a:lvl9pPr marL="3657600" algn="l" defTabSz="457200" rtl="0" eaLnBrk="1" latinLnBrk="0" hangingPunct="1">
       <a:defRPr sz="1800" kern="1200">
         <a:solidFill>
           <a:schemeClr val="tx1"/>
@@ -445,7 +449,6 @@
           </a:p>
         </c:rich>
       </c:tx>
-      <c:layout/>
       <c:overlay val="0"/>
     </c:title>
     <c:autoTitleDeleted val="0"/>
@@ -558,7 +561,6 @@
           <c:dLbls>
             <c:dLbl>
               <c:idx val="0"/>
-              <c:layout/>
               <c:numFmt formatCode="0%" sourceLinked="0"/>
               <c:spPr/>
               <c:txPr>
@@ -583,9 +585,7 @@
               <c:showPercent val="1"/>
               <c:showBubbleSize val="0"/>
               <c:extLst>
-                <c:ext xmlns:c15="http://schemas.microsoft.com/office/drawing/2012/chart" uri="{CE6537A1-D6FC-4f65-9D91-7224C49458BB}">
-                  <c15:layout/>
-                </c:ext>
+                <c:ext xmlns:c15="http://schemas.microsoft.com/office/drawing/2012/chart" uri="{CE6537A1-D6FC-4f65-9D91-7224C49458BB}"/>
                 <c:ext xmlns:c16="http://schemas.microsoft.com/office/drawing/2014/chart" uri="{C3380CC4-5D6E-409C-BE32-E72D297353CC}">
                   <c16:uniqueId val="{00000001-137B-4627-A940-EA707C7B4661}"/>
                 </c:ext>
@@ -593,7 +593,6 @@
             </c:dLbl>
             <c:dLbl>
               <c:idx val="1"/>
-              <c:layout/>
               <c:numFmt formatCode="0%" sourceLinked="0"/>
               <c:spPr/>
               <c:txPr>
@@ -618,9 +617,7 @@
               <c:showPercent val="1"/>
               <c:showBubbleSize val="0"/>
               <c:extLst>
-                <c:ext xmlns:c15="http://schemas.microsoft.com/office/drawing/2012/chart" uri="{CE6537A1-D6FC-4f65-9D91-7224C49458BB}">
-                  <c15:layout/>
-                </c:ext>
+                <c:ext xmlns:c15="http://schemas.microsoft.com/office/drawing/2012/chart" uri="{CE6537A1-D6FC-4f65-9D91-7224C49458BB}"/>
                 <c:ext xmlns:c16="http://schemas.microsoft.com/office/drawing/2014/chart" uri="{C3380CC4-5D6E-409C-BE32-E72D297353CC}">
                   <c16:uniqueId val="{00000003-137B-4627-A940-EA707C7B4661}"/>
                 </c:ext>
@@ -628,7 +625,6 @@
             </c:dLbl>
             <c:dLbl>
               <c:idx val="2"/>
-              <c:layout/>
               <c:numFmt formatCode="0%" sourceLinked="0"/>
               <c:spPr/>
               <c:txPr>
@@ -653,9 +649,7 @@
               <c:showPercent val="1"/>
               <c:showBubbleSize val="0"/>
               <c:extLst>
-                <c:ext xmlns:c15="http://schemas.microsoft.com/office/drawing/2012/chart" uri="{CE6537A1-D6FC-4f65-9D91-7224C49458BB}">
-                  <c15:layout/>
-                </c:ext>
+                <c:ext xmlns:c15="http://schemas.microsoft.com/office/drawing/2012/chart" uri="{CE6537A1-D6FC-4f65-9D91-7224C49458BB}"/>
                 <c:ext xmlns:c16="http://schemas.microsoft.com/office/drawing/2014/chart" uri="{C3380CC4-5D6E-409C-BE32-E72D297353CC}">
                   <c16:uniqueId val="{00000005-137B-4627-A940-EA707C7B4661}"/>
                 </c:ext>
@@ -663,7 +657,6 @@
             </c:dLbl>
             <c:dLbl>
               <c:idx val="3"/>
-              <c:layout/>
               <c:numFmt formatCode="0%" sourceLinked="0"/>
               <c:spPr/>
               <c:txPr>
@@ -688,9 +681,7 @@
               <c:showPercent val="1"/>
               <c:showBubbleSize val="0"/>
               <c:extLst>
-                <c:ext xmlns:c15="http://schemas.microsoft.com/office/drawing/2012/chart" uri="{CE6537A1-D6FC-4f65-9D91-7224C49458BB}">
-                  <c15:layout/>
-                </c:ext>
+                <c:ext xmlns:c15="http://schemas.microsoft.com/office/drawing/2012/chart" uri="{CE6537A1-D6FC-4f65-9D91-7224C49458BB}"/>
                 <c:ext xmlns:c16="http://schemas.microsoft.com/office/drawing/2014/chart" uri="{C3380CC4-5D6E-409C-BE32-E72D297353CC}">
                   <c16:uniqueId val="{00000007-137B-4627-A940-EA707C7B4661}"/>
                 </c:ext>
@@ -698,7 +689,6 @@
             </c:dLbl>
             <c:dLbl>
               <c:idx val="4"/>
-              <c:layout/>
               <c:numFmt formatCode="0%" sourceLinked="0"/>
               <c:spPr/>
               <c:txPr>
@@ -723,9 +713,7 @@
               <c:showPercent val="1"/>
               <c:showBubbleSize val="0"/>
               <c:extLst>
-                <c:ext xmlns:c15="http://schemas.microsoft.com/office/drawing/2012/chart" uri="{CE6537A1-D6FC-4f65-9D91-7224C49458BB}">
-                  <c15:layout/>
-                </c:ext>
+                <c:ext xmlns:c15="http://schemas.microsoft.com/office/drawing/2012/chart" uri="{CE6537A1-D6FC-4f65-9D91-7224C49458BB}"/>
                 <c:ext xmlns:c16="http://schemas.microsoft.com/office/drawing/2014/chart" uri="{C3380CC4-5D6E-409C-BE32-E72D297353CC}">
                   <c16:uniqueId val="{00000009-137B-4627-A940-EA707C7B4661}"/>
                 </c:ext>
@@ -840,7 +828,6 @@
     </c:plotArea>
     <c:legend>
       <c:legendPos val="b"/>
-      <c:layout/>
       <c:overlay val="0"/>
       <c:txPr>
         <a:bodyPr/>
@@ -909,7 +896,6 @@
           </a:p>
         </c:rich>
       </c:tx>
-      <c:layout/>
       <c:overlay val="0"/>
     </c:title>
     <c:autoTitleDeleted val="0"/>
@@ -1047,7 +1033,6 @@
             <c:showLeaderLines val="0"/>
             <c:extLst>
               <c:ext xmlns:c15="http://schemas.microsoft.com/office/drawing/2012/chart" uri="{CE6537A1-D6FC-4f65-9D91-7224C49458BB}">
-                <c15:layout/>
                 <c15:showLeaderLines val="0"/>
               </c:ext>
             </c:extLst>
@@ -1269,7 +1254,6 @@
           </a:p>
         </c:rich>
       </c:tx>
-      <c:layout/>
       <c:overlay val="0"/>
     </c:title>
     <c:autoTitleDeleted val="0"/>
@@ -1337,7 +1321,6 @@
           <c:dLbls>
             <c:dLbl>
               <c:idx val="0"/>
-              <c:layout/>
               <c:numFmt formatCode="0%" sourceLinked="0"/>
               <c:spPr/>
               <c:txPr>
@@ -1362,9 +1345,7 @@
               <c:showPercent val="1"/>
               <c:showBubbleSize val="0"/>
               <c:extLst>
-                <c:ext xmlns:c15="http://schemas.microsoft.com/office/drawing/2012/chart" uri="{CE6537A1-D6FC-4f65-9D91-7224C49458BB}">
-                  <c15:layout/>
-                </c:ext>
+                <c:ext xmlns:c15="http://schemas.microsoft.com/office/drawing/2012/chart" uri="{CE6537A1-D6FC-4f65-9D91-7224C49458BB}"/>
                 <c:ext xmlns:c16="http://schemas.microsoft.com/office/drawing/2014/chart" uri="{C3380CC4-5D6E-409C-BE32-E72D297353CC}">
                   <c16:uniqueId val="{00000001-231B-41DE-80EC-047910DAEEC1}"/>
                 </c:ext>
@@ -1372,7 +1353,6 @@
             </c:dLbl>
             <c:dLbl>
               <c:idx val="1"/>
-              <c:layout/>
               <c:numFmt formatCode="0%" sourceLinked="0"/>
               <c:spPr/>
               <c:txPr>
@@ -1397,9 +1377,7 @@
               <c:showPercent val="1"/>
               <c:showBubbleSize val="0"/>
               <c:extLst>
-                <c:ext xmlns:c15="http://schemas.microsoft.com/office/drawing/2012/chart" uri="{CE6537A1-D6FC-4f65-9D91-7224C49458BB}">
-                  <c15:layout/>
-                </c:ext>
+                <c:ext xmlns:c15="http://schemas.microsoft.com/office/drawing/2012/chart" uri="{CE6537A1-D6FC-4f65-9D91-7224C49458BB}"/>
                 <c:ext xmlns:c16="http://schemas.microsoft.com/office/drawing/2014/chart" uri="{C3380CC4-5D6E-409C-BE32-E72D297353CC}">
                   <c16:uniqueId val="{00000003-231B-41DE-80EC-047910DAEEC1}"/>
                 </c:ext>
@@ -1496,7 +1474,6 @@
     </c:plotArea>
     <c:legend>
       <c:legendPos val="b"/>
-      <c:layout/>
       <c:overlay val="0"/>
       <c:txPr>
         <a:bodyPr/>
@@ -1565,7 +1542,6 @@
           </a:p>
         </c:rich>
       </c:tx>
-      <c:layout/>
       <c:overlay val="0"/>
     </c:title>
     <c:autoTitleDeleted val="0"/>
@@ -1703,7 +1679,6 @@
             <c:showLeaderLines val="0"/>
             <c:extLst>
               <c:ext xmlns:c15="http://schemas.microsoft.com/office/drawing/2012/chart" uri="{CE6537A1-D6FC-4f65-9D91-7224C49458BB}">
-                <c15:layout/>
                 <c15:showLeaderLines val="0"/>
               </c:ext>
             </c:extLst>
@@ -1925,7 +1900,6 @@
           </a:p>
         </c:rich>
       </c:tx>
-      <c:layout/>
       <c:overlay val="0"/>
     </c:title>
     <c:autoTitleDeleted val="0"/>
@@ -2038,7 +2012,6 @@
           <c:dLbls>
             <c:dLbl>
               <c:idx val="0"/>
-              <c:layout/>
               <c:numFmt formatCode="0%" sourceLinked="0"/>
               <c:spPr/>
               <c:txPr>
@@ -2063,9 +2036,7 @@
               <c:showPercent val="1"/>
               <c:showBubbleSize val="0"/>
               <c:extLst>
-                <c:ext xmlns:c15="http://schemas.microsoft.com/office/drawing/2012/chart" uri="{CE6537A1-D6FC-4f65-9D91-7224C49458BB}">
-                  <c15:layout/>
-                </c:ext>
+                <c:ext xmlns:c15="http://schemas.microsoft.com/office/drawing/2012/chart" uri="{CE6537A1-D6FC-4f65-9D91-7224C49458BB}"/>
                 <c:ext xmlns:c16="http://schemas.microsoft.com/office/drawing/2014/chart" uri="{C3380CC4-5D6E-409C-BE32-E72D297353CC}">
                   <c16:uniqueId val="{00000001-D071-4CCD-8E9B-49154A6AEBBA}"/>
                 </c:ext>
@@ -2073,7 +2044,6 @@
             </c:dLbl>
             <c:dLbl>
               <c:idx val="1"/>
-              <c:layout/>
               <c:numFmt formatCode="0%" sourceLinked="0"/>
               <c:spPr/>
               <c:txPr>
@@ -2098,9 +2068,7 @@
               <c:showPercent val="1"/>
               <c:showBubbleSize val="0"/>
               <c:extLst>
-                <c:ext xmlns:c15="http://schemas.microsoft.com/office/drawing/2012/chart" uri="{CE6537A1-D6FC-4f65-9D91-7224C49458BB}">
-                  <c15:layout/>
-                </c:ext>
+                <c:ext xmlns:c15="http://schemas.microsoft.com/office/drawing/2012/chart" uri="{CE6537A1-D6FC-4f65-9D91-7224C49458BB}"/>
                 <c:ext xmlns:c16="http://schemas.microsoft.com/office/drawing/2014/chart" uri="{C3380CC4-5D6E-409C-BE32-E72D297353CC}">
                   <c16:uniqueId val="{00000003-D071-4CCD-8E9B-49154A6AEBBA}"/>
                 </c:ext>
@@ -2108,7 +2076,6 @@
             </c:dLbl>
             <c:dLbl>
               <c:idx val="2"/>
-              <c:layout/>
               <c:numFmt formatCode="0%" sourceLinked="0"/>
               <c:spPr/>
               <c:txPr>
@@ -2133,9 +2100,7 @@
               <c:showPercent val="1"/>
               <c:showBubbleSize val="0"/>
               <c:extLst>
-                <c:ext xmlns:c15="http://schemas.microsoft.com/office/drawing/2012/chart" uri="{CE6537A1-D6FC-4f65-9D91-7224C49458BB}">
-                  <c15:layout/>
-                </c:ext>
+                <c:ext xmlns:c15="http://schemas.microsoft.com/office/drawing/2012/chart" uri="{CE6537A1-D6FC-4f65-9D91-7224C49458BB}"/>
                 <c:ext xmlns:c16="http://schemas.microsoft.com/office/drawing/2014/chart" uri="{C3380CC4-5D6E-409C-BE32-E72D297353CC}">
                   <c16:uniqueId val="{00000005-D071-4CCD-8E9B-49154A6AEBBA}"/>
                 </c:ext>
@@ -2143,7 +2108,6 @@
             </c:dLbl>
             <c:dLbl>
               <c:idx val="3"/>
-              <c:layout/>
               <c:numFmt formatCode="0%" sourceLinked="0"/>
               <c:spPr/>
               <c:txPr>
@@ -2168,9 +2132,7 @@
               <c:showPercent val="1"/>
               <c:showBubbleSize val="0"/>
               <c:extLst>
-                <c:ext xmlns:c15="http://schemas.microsoft.com/office/drawing/2012/chart" uri="{CE6537A1-D6FC-4f65-9D91-7224C49458BB}">
-                  <c15:layout/>
-                </c:ext>
+                <c:ext xmlns:c15="http://schemas.microsoft.com/office/drawing/2012/chart" uri="{CE6537A1-D6FC-4f65-9D91-7224C49458BB}"/>
                 <c:ext xmlns:c16="http://schemas.microsoft.com/office/drawing/2014/chart" uri="{C3380CC4-5D6E-409C-BE32-E72D297353CC}">
                   <c16:uniqueId val="{00000007-D071-4CCD-8E9B-49154A6AEBBA}"/>
                 </c:ext>
@@ -2178,7 +2140,6 @@
             </c:dLbl>
             <c:dLbl>
               <c:idx val="4"/>
-              <c:layout/>
               <c:numFmt formatCode="0%" sourceLinked="0"/>
               <c:spPr/>
               <c:txPr>
@@ -2203,9 +2164,7 @@
               <c:showPercent val="1"/>
               <c:showBubbleSize val="0"/>
               <c:extLst>
-                <c:ext xmlns:c15="http://schemas.microsoft.com/office/drawing/2012/chart" uri="{CE6537A1-D6FC-4f65-9D91-7224C49458BB}">
-                  <c15:layout/>
-                </c:ext>
+                <c:ext xmlns:c15="http://schemas.microsoft.com/office/drawing/2012/chart" uri="{CE6537A1-D6FC-4f65-9D91-7224C49458BB}"/>
                 <c:ext xmlns:c16="http://schemas.microsoft.com/office/drawing/2014/chart" uri="{C3380CC4-5D6E-409C-BE32-E72D297353CC}">
                   <c16:uniqueId val="{00000009-D071-4CCD-8E9B-49154A6AEBBA}"/>
                 </c:ext>
@@ -2320,7 +2279,6 @@
     </c:plotArea>
     <c:legend>
       <c:legendPos val="b"/>
-      <c:layout/>
       <c:overlay val="0"/>
       <c:txPr>
         <a:bodyPr/>
@@ -2389,7 +2347,6 @@
           </a:p>
         </c:rich>
       </c:tx>
-      <c:layout/>
       <c:overlay val="0"/>
     </c:title>
     <c:autoTitleDeleted val="0"/>
@@ -2424,12 +2381,6 @@
             <c:idx val="0"/>
             <c:invertIfNegative val="0"/>
             <c:bubble3D val="0"/>
-            <c:spPr>
-              <a:solidFill>
-                <a:srgbClr val="F5A623"/>
-              </a:solidFill>
-              <a:effectLst/>
-            </c:spPr>
             <c:extLst>
               <c:ext xmlns:c16="http://schemas.microsoft.com/office/drawing/2014/chart" uri="{C3380CC4-5D6E-409C-BE32-E72D297353CC}">
                 <c16:uniqueId val="{00000001-FACD-42A6-ADE5-5DAA8588C9C6}"/>
@@ -2517,7 +2468,6 @@
             <c:showLeaderLines val="0"/>
             <c:extLst>
               <c:ext xmlns:c15="http://schemas.microsoft.com/office/drawing/2012/chart" uri="{CE6537A1-D6FC-4f65-9D91-7224C49458BB}">
-                <c15:layout/>
                 <c15:showLeaderLines val="0"/>
               </c:ext>
             </c:extLst>
@@ -2733,7 +2683,6 @@
           </a:p>
         </c:rich>
       </c:tx>
-      <c:layout/>
       <c:overlay val="0"/>
     </c:title>
     <c:autoTitleDeleted val="0"/>
@@ -2887,7 +2836,6 @@
             <c:showLeaderLines val="0"/>
             <c:extLst>
               <c:ext xmlns:c15="http://schemas.microsoft.com/office/drawing/2012/chart" uri="{CE6537A1-D6FC-4f65-9D91-7224C49458BB}">
-                <c15:layout/>
                 <c15:showLeaderLines val="0"/>
               </c:ext>
             </c:extLst>
@@ -3115,7 +3063,6 @@
           </a:p>
         </c:rich>
       </c:tx>
-      <c:layout/>
       <c:overlay val="0"/>
     </c:title>
     <c:autoTitleDeleted val="0"/>
@@ -3150,12 +3097,6 @@
             <c:idx val="0"/>
             <c:invertIfNegative val="0"/>
             <c:bubble3D val="0"/>
-            <c:spPr>
-              <a:solidFill>
-                <a:srgbClr val="00C2CB"/>
-              </a:solidFill>
-              <a:effectLst/>
-            </c:spPr>
             <c:extLst>
               <c:ext xmlns:c16="http://schemas.microsoft.com/office/drawing/2014/chart" uri="{C3380CC4-5D6E-409C-BE32-E72D297353CC}">
                 <c16:uniqueId val="{00000001-376D-44DA-8880-C5BA53684431}"/>
@@ -3259,7 +3200,6 @@
             <c:showLeaderLines val="0"/>
             <c:extLst>
               <c:ext xmlns:c15="http://schemas.microsoft.com/office/drawing/2012/chart" uri="{CE6537A1-D6FC-4f65-9D91-7224C49458BB}">
-                <c15:layout/>
                 <c15:showLeaderLines val="0"/>
               </c:ext>
             </c:extLst>
@@ -3724,7 +3664,7 @@
           <a:p>
             <a:fld id="{F7021451-1387-4CA6-816F-3879F97B5CBC}" type="slidenum">
               <a:rPr lang="en-US"/>
-              <a:t>10</a:t>
+              <a:t>11</a:t>
             </a:fld>
             <a:endParaRPr lang="en-US"/>
           </a:p>
@@ -3808,7 +3748,7 @@
           <a:p>
             <a:fld id="{F7021451-1387-4CA6-816F-3879F97B5CBC}" type="slidenum">
               <a:rPr lang="en-US"/>
-              <a:t>11</a:t>
+              <a:t>12</a:t>
             </a:fld>
             <a:endParaRPr lang="en-US"/>
           </a:p>
@@ -3892,7 +3832,7 @@
           <a:p>
             <a:fld id="{F7021451-1387-4CA6-816F-3879F97B5CBC}" type="slidenum">
               <a:rPr lang="en-US"/>
-              <a:t>12</a:t>
+              <a:t>13</a:t>
             </a:fld>
             <a:endParaRPr lang="en-US"/>
           </a:p>
@@ -3976,7 +3916,7 @@
           <a:p>
             <a:fld id="{F7021451-1387-4CA6-816F-3879F97B5CBC}" type="slidenum">
               <a:rPr lang="en-US"/>
-              <a:t>13</a:t>
+              <a:t>14</a:t>
             </a:fld>
             <a:endParaRPr lang="en-US"/>
           </a:p>
@@ -4144,7 +4084,7 @@
           <a:p>
             <a:fld id="{F7021451-1387-4CA6-816F-3879F97B5CBC}" type="slidenum">
               <a:rPr lang="en-US"/>
-              <a:t>3</a:t>
+              <a:t>4</a:t>
             </a:fld>
             <a:endParaRPr lang="en-US"/>
           </a:p>
@@ -4228,7 +4168,7 @@
           <a:p>
             <a:fld id="{F7021451-1387-4CA6-816F-3879F97B5CBC}" type="slidenum">
               <a:rPr lang="en-US"/>
-              <a:t>4</a:t>
+              <a:t>5</a:t>
             </a:fld>
             <a:endParaRPr lang="en-US"/>
           </a:p>
@@ -4312,7 +4252,7 @@
           <a:p>
             <a:fld id="{F7021451-1387-4CA6-816F-3879F97B5CBC}" type="slidenum">
               <a:rPr lang="en-US"/>
-              <a:t>5</a:t>
+              <a:t>6</a:t>
             </a:fld>
             <a:endParaRPr lang="en-US"/>
           </a:p>
@@ -4396,7 +4336,7 @@
           <a:p>
             <a:fld id="{F7021451-1387-4CA6-816F-3879F97B5CBC}" type="slidenum">
               <a:rPr lang="en-US"/>
-              <a:t>6</a:t>
+              <a:t>7</a:t>
             </a:fld>
             <a:endParaRPr lang="en-US"/>
           </a:p>
@@ -4480,7 +4420,7 @@
           <a:p>
             <a:fld id="{F7021451-1387-4CA6-816F-3879F97B5CBC}" type="slidenum">
               <a:rPr lang="en-US"/>
-              <a:t>7</a:t>
+              <a:t>8</a:t>
             </a:fld>
             <a:endParaRPr lang="en-US"/>
           </a:p>
@@ -4564,7 +4504,7 @@
           <a:p>
             <a:fld id="{F7021451-1387-4CA6-816F-3879F97B5CBC}" type="slidenum">
               <a:rPr lang="en-US"/>
-              <a:t>8</a:t>
+              <a:t>9</a:t>
             </a:fld>
             <a:endParaRPr lang="en-US"/>
           </a:p>
@@ -4648,7 +4588,7 @@
           <a:p>
             <a:fld id="{F7021451-1387-4CA6-816F-3879F97B5CBC}" type="slidenum">
               <a:rPr lang="en-US"/>
-              <a:t>9</a:t>
+              <a:t>10</a:t>
             </a:fld>
             <a:endParaRPr lang="en-US"/>
           </a:p>
@@ -4668,7 +4608,552 @@
 </file>
 
 <file path=ppt/slideLayouts/slideLayout1.xml><?xml version="1.0" encoding="utf-8"?>
-<p:sldLayout xmlns:a="http://schemas.openxmlformats.org/drawingml/2006/main" xmlns:r="http://schemas.openxmlformats.org/officeDocument/2006/relationships" xmlns:p="http://schemas.openxmlformats.org/presentationml/2006/main" preserve="1">
+<p:sldLayout xmlns:a="http://schemas.openxmlformats.org/drawingml/2006/main" xmlns:r="http://schemas.openxmlformats.org/officeDocument/2006/relationships" xmlns:p="http://schemas.openxmlformats.org/presentationml/2006/main" type="title" preserve="1">
+  <p:cSld name="Title Slide">
+    <p:spTree>
+      <p:nvGrpSpPr>
+        <p:cNvPr id="1" name=""/>
+        <p:cNvGrpSpPr/>
+        <p:nvPr/>
+      </p:nvGrpSpPr>
+      <p:grpSpPr>
+        <a:xfrm>
+          <a:off x="0" y="0"/>
+          <a:ext cx="0" cy="0"/>
+          <a:chOff x="0" y="0"/>
+          <a:chExt cx="0" cy="0"/>
+        </a:xfrm>
+      </p:grpSpPr>
+      <p:sp>
+        <p:nvSpPr>
+          <p:cNvPr id="2" name="Title 1"/>
+          <p:cNvSpPr>
+            <a:spLocks noGrp="1"/>
+          </p:cNvSpPr>
+          <p:nvPr>
+            <p:ph type="ctrTitle"/>
+          </p:nvPr>
+        </p:nvSpPr>
+        <p:spPr>
+          <a:xfrm>
+            <a:off x="1143000" y="841772"/>
+            <a:ext cx="6858000" cy="1790700"/>
+          </a:xfrm>
+        </p:spPr>
+        <p:txBody>
+          <a:bodyPr anchor="b"/>
+          <a:lstStyle>
+            <a:lvl1pPr algn="ctr">
+              <a:defRPr sz="4500"/>
+            </a:lvl1pPr>
+          </a:lstStyle>
+          <a:p>
+            <a:r>
+              <a:rPr lang="en-US"/>
+              <a:t>Click to edit Master title style</a:t>
+            </a:r>
+            <a:endParaRPr lang="en-US" dirty="0"/>
+          </a:p>
+        </p:txBody>
+      </p:sp>
+      <p:sp>
+        <p:nvSpPr>
+          <p:cNvPr id="3" name="Subtitle 2"/>
+          <p:cNvSpPr>
+            <a:spLocks noGrp="1"/>
+          </p:cNvSpPr>
+          <p:nvPr>
+            <p:ph type="subTitle" idx="1"/>
+          </p:nvPr>
+        </p:nvSpPr>
+        <p:spPr>
+          <a:xfrm>
+            <a:off x="1143000" y="2701528"/>
+            <a:ext cx="6858000" cy="1241822"/>
+          </a:xfrm>
+        </p:spPr>
+        <p:txBody>
+          <a:bodyPr/>
+          <a:lstStyle>
+            <a:lvl1pPr marL="0" indent="0" algn="ctr">
+              <a:buNone/>
+              <a:defRPr sz="1800"/>
+            </a:lvl1pPr>
+            <a:lvl2pPr marL="342900" indent="0" algn="ctr">
+              <a:buNone/>
+              <a:defRPr sz="1500"/>
+            </a:lvl2pPr>
+            <a:lvl3pPr marL="685800" indent="0" algn="ctr">
+              <a:buNone/>
+              <a:defRPr sz="1350"/>
+            </a:lvl3pPr>
+            <a:lvl4pPr marL="1028700" indent="0" algn="ctr">
+              <a:buNone/>
+              <a:defRPr sz="1200"/>
+            </a:lvl4pPr>
+            <a:lvl5pPr marL="1371600" indent="0" algn="ctr">
+              <a:buNone/>
+              <a:defRPr sz="1200"/>
+            </a:lvl5pPr>
+            <a:lvl6pPr marL="1714500" indent="0" algn="ctr">
+              <a:buNone/>
+              <a:defRPr sz="1200"/>
+            </a:lvl6pPr>
+            <a:lvl7pPr marL="2057400" indent="0" algn="ctr">
+              <a:buNone/>
+              <a:defRPr sz="1200"/>
+            </a:lvl7pPr>
+            <a:lvl8pPr marL="2400300" indent="0" algn="ctr">
+              <a:buNone/>
+              <a:defRPr sz="1200"/>
+            </a:lvl8pPr>
+            <a:lvl9pPr marL="2743200" indent="0" algn="ctr">
+              <a:buNone/>
+              <a:defRPr sz="1200"/>
+            </a:lvl9pPr>
+          </a:lstStyle>
+          <a:p>
+            <a:r>
+              <a:rPr lang="en-US"/>
+              <a:t>Click to edit Master subtitle style</a:t>
+            </a:r>
+            <a:endParaRPr lang="en-US" dirty="0"/>
+          </a:p>
+        </p:txBody>
+      </p:sp>
+      <p:sp>
+        <p:nvSpPr>
+          <p:cNvPr id="4" name="Date Placeholder 3"/>
+          <p:cNvSpPr>
+            <a:spLocks noGrp="1"/>
+          </p:cNvSpPr>
+          <p:nvPr>
+            <p:ph type="dt" sz="half" idx="10"/>
+          </p:nvPr>
+        </p:nvSpPr>
+        <p:spPr/>
+        <p:txBody>
+          <a:bodyPr/>
+          <a:lstStyle/>
+          <a:p>
+            <a:fld id="{C764DE79-268F-4C1A-8933-263129D2AF90}" type="datetimeFigureOut">
+              <a:rPr lang="en-US" smtClean="0"/>
+              <a:t>3/10/2026</a:t>
+            </a:fld>
+            <a:endParaRPr lang="en-US" dirty="0"/>
+          </a:p>
+        </p:txBody>
+      </p:sp>
+      <p:sp>
+        <p:nvSpPr>
+          <p:cNvPr id="5" name="Footer Placeholder 4"/>
+          <p:cNvSpPr>
+            <a:spLocks noGrp="1"/>
+          </p:cNvSpPr>
+          <p:nvPr>
+            <p:ph type="ftr" sz="quarter" idx="11"/>
+          </p:nvPr>
+        </p:nvSpPr>
+        <p:spPr/>
+        <p:txBody>
+          <a:bodyPr/>
+          <a:lstStyle/>
+          <a:p>
+            <a:endParaRPr lang="en-US" dirty="0"/>
+          </a:p>
+        </p:txBody>
+      </p:sp>
+      <p:sp>
+        <p:nvSpPr>
+          <p:cNvPr id="6" name="Slide Number Placeholder 5"/>
+          <p:cNvSpPr>
+            <a:spLocks noGrp="1"/>
+          </p:cNvSpPr>
+          <p:nvPr>
+            <p:ph type="sldNum" sz="quarter" idx="12"/>
+          </p:nvPr>
+        </p:nvSpPr>
+        <p:spPr/>
+        <p:txBody>
+          <a:bodyPr/>
+          <a:lstStyle/>
+          <a:p>
+            <a:fld id="{48F63A3B-78C7-47BE-AE5E-E10140E04643}" type="slidenum">
+              <a:rPr lang="en-US" smtClean="0"/>
+              <a:t>‹#›</a:t>
+            </a:fld>
+            <a:endParaRPr lang="en-US" dirty="0"/>
+          </a:p>
+        </p:txBody>
+      </p:sp>
+    </p:spTree>
+    <p:extLst>
+      <p:ext uri="{BB962C8B-B14F-4D97-AF65-F5344CB8AC3E}">
+        <p14:creationId xmlns:p14="http://schemas.microsoft.com/office/powerpoint/2010/main" val="4016644273"/>
+      </p:ext>
+    </p:extLst>
+  </p:cSld>
+  <p:clrMapOvr>
+    <a:masterClrMapping/>
+  </p:clrMapOvr>
+  <p:hf sldNum="0" hdr="0" ftr="0" dt="0"/>
+</p:sldLayout>
+</file>
+
+<file path=ppt/slideLayouts/slideLayout10.xml><?xml version="1.0" encoding="utf-8"?>
+<p:sldLayout xmlns:a="http://schemas.openxmlformats.org/drawingml/2006/main" xmlns:r="http://schemas.openxmlformats.org/officeDocument/2006/relationships" xmlns:p="http://schemas.openxmlformats.org/presentationml/2006/main" type="vertTx" preserve="1">
+  <p:cSld name="Title and Vertical Text">
+    <p:spTree>
+      <p:nvGrpSpPr>
+        <p:cNvPr id="1" name=""/>
+        <p:cNvGrpSpPr/>
+        <p:nvPr/>
+      </p:nvGrpSpPr>
+      <p:grpSpPr>
+        <a:xfrm>
+          <a:off x="0" y="0"/>
+          <a:ext cx="0" cy="0"/>
+          <a:chOff x="0" y="0"/>
+          <a:chExt cx="0" cy="0"/>
+        </a:xfrm>
+      </p:grpSpPr>
+      <p:sp>
+        <p:nvSpPr>
+          <p:cNvPr id="2" name="Title 1"/>
+          <p:cNvSpPr>
+            <a:spLocks noGrp="1"/>
+          </p:cNvSpPr>
+          <p:nvPr>
+            <p:ph type="title"/>
+          </p:nvPr>
+        </p:nvSpPr>
+        <p:spPr/>
+        <p:txBody>
+          <a:bodyPr/>
+          <a:lstStyle/>
+          <a:p>
+            <a:r>
+              <a:rPr lang="en-US"/>
+              <a:t>Click to edit Master title style</a:t>
+            </a:r>
+            <a:endParaRPr lang="en-US" dirty="0"/>
+          </a:p>
+        </p:txBody>
+      </p:sp>
+      <p:sp>
+        <p:nvSpPr>
+          <p:cNvPr id="3" name="Vertical Text Placeholder 2"/>
+          <p:cNvSpPr>
+            <a:spLocks noGrp="1"/>
+          </p:cNvSpPr>
+          <p:nvPr>
+            <p:ph type="body" orient="vert" idx="1"/>
+          </p:nvPr>
+        </p:nvSpPr>
+        <p:spPr/>
+        <p:txBody>
+          <a:bodyPr vert="eaVert"/>
+          <a:lstStyle/>
+          <a:p>
+            <a:pPr lvl="0"/>
+            <a:r>
+              <a:rPr lang="en-US"/>
+              <a:t>Click to edit Master text styles</a:t>
+            </a:r>
+          </a:p>
+          <a:p>
+            <a:pPr lvl="1"/>
+            <a:r>
+              <a:rPr lang="en-US"/>
+              <a:t>Second level</a:t>
+            </a:r>
+          </a:p>
+          <a:p>
+            <a:pPr lvl="2"/>
+            <a:r>
+              <a:rPr lang="en-US"/>
+              <a:t>Third level</a:t>
+            </a:r>
+          </a:p>
+          <a:p>
+            <a:pPr lvl="3"/>
+            <a:r>
+              <a:rPr lang="en-US"/>
+              <a:t>Fourth level</a:t>
+            </a:r>
+          </a:p>
+          <a:p>
+            <a:pPr lvl="4"/>
+            <a:r>
+              <a:rPr lang="en-US"/>
+              <a:t>Fifth level</a:t>
+            </a:r>
+            <a:endParaRPr lang="en-US" dirty="0"/>
+          </a:p>
+        </p:txBody>
+      </p:sp>
+      <p:sp>
+        <p:nvSpPr>
+          <p:cNvPr id="4" name="Date Placeholder 3"/>
+          <p:cNvSpPr>
+            <a:spLocks noGrp="1"/>
+          </p:cNvSpPr>
+          <p:nvPr>
+            <p:ph type="dt" sz="half" idx="10"/>
+          </p:nvPr>
+        </p:nvSpPr>
+        <p:spPr/>
+        <p:txBody>
+          <a:bodyPr/>
+          <a:lstStyle/>
+          <a:p>
+            <a:fld id="{C764DE79-268F-4C1A-8933-263129D2AF90}" type="datetimeFigureOut">
+              <a:rPr lang="en-US" smtClean="0"/>
+              <a:t>3/10/2026</a:t>
+            </a:fld>
+            <a:endParaRPr lang="en-US" dirty="0"/>
+          </a:p>
+        </p:txBody>
+      </p:sp>
+      <p:sp>
+        <p:nvSpPr>
+          <p:cNvPr id="5" name="Footer Placeholder 4"/>
+          <p:cNvSpPr>
+            <a:spLocks noGrp="1"/>
+          </p:cNvSpPr>
+          <p:nvPr>
+            <p:ph type="ftr" sz="quarter" idx="11"/>
+          </p:nvPr>
+        </p:nvSpPr>
+        <p:spPr/>
+        <p:txBody>
+          <a:bodyPr/>
+          <a:lstStyle/>
+          <a:p>
+            <a:endParaRPr lang="en-US" dirty="0"/>
+          </a:p>
+        </p:txBody>
+      </p:sp>
+      <p:sp>
+        <p:nvSpPr>
+          <p:cNvPr id="6" name="Slide Number Placeholder 5"/>
+          <p:cNvSpPr>
+            <a:spLocks noGrp="1"/>
+          </p:cNvSpPr>
+          <p:nvPr>
+            <p:ph type="sldNum" sz="quarter" idx="12"/>
+          </p:nvPr>
+        </p:nvSpPr>
+        <p:spPr/>
+        <p:txBody>
+          <a:bodyPr/>
+          <a:lstStyle/>
+          <a:p>
+            <a:fld id="{48F63A3B-78C7-47BE-AE5E-E10140E04643}" type="slidenum">
+              <a:rPr lang="en-US" smtClean="0"/>
+              <a:t>‹#›</a:t>
+            </a:fld>
+            <a:endParaRPr lang="en-US" dirty="0"/>
+          </a:p>
+        </p:txBody>
+      </p:sp>
+    </p:spTree>
+    <p:extLst>
+      <p:ext uri="{BB962C8B-B14F-4D97-AF65-F5344CB8AC3E}">
+        <p14:creationId xmlns:p14="http://schemas.microsoft.com/office/powerpoint/2010/main" val="3927098880"/>
+      </p:ext>
+    </p:extLst>
+  </p:cSld>
+  <p:clrMapOvr>
+    <a:masterClrMapping/>
+  </p:clrMapOvr>
+  <p:hf sldNum="0" hdr="0" ftr="0" dt="0"/>
+</p:sldLayout>
+</file>
+
+<file path=ppt/slideLayouts/slideLayout11.xml><?xml version="1.0" encoding="utf-8"?>
+<p:sldLayout xmlns:a="http://schemas.openxmlformats.org/drawingml/2006/main" xmlns:r="http://schemas.openxmlformats.org/officeDocument/2006/relationships" xmlns:p="http://schemas.openxmlformats.org/presentationml/2006/main" type="vertTitleAndTx" preserve="1">
+  <p:cSld name="Vertical Title and Text">
+    <p:spTree>
+      <p:nvGrpSpPr>
+        <p:cNvPr id="1" name=""/>
+        <p:cNvGrpSpPr/>
+        <p:nvPr/>
+      </p:nvGrpSpPr>
+      <p:grpSpPr>
+        <a:xfrm>
+          <a:off x="0" y="0"/>
+          <a:ext cx="0" cy="0"/>
+          <a:chOff x="0" y="0"/>
+          <a:chExt cx="0" cy="0"/>
+        </a:xfrm>
+      </p:grpSpPr>
+      <p:sp>
+        <p:nvSpPr>
+          <p:cNvPr id="2" name="Vertical Title 1"/>
+          <p:cNvSpPr>
+            <a:spLocks noGrp="1"/>
+          </p:cNvSpPr>
+          <p:nvPr>
+            <p:ph type="title" orient="vert"/>
+          </p:nvPr>
+        </p:nvSpPr>
+        <p:spPr>
+          <a:xfrm>
+            <a:off x="6543675" y="273844"/>
+            <a:ext cx="1971675" cy="4358879"/>
+          </a:xfrm>
+        </p:spPr>
+        <p:txBody>
+          <a:bodyPr vert="eaVert"/>
+          <a:lstStyle/>
+          <a:p>
+            <a:r>
+              <a:rPr lang="en-US"/>
+              <a:t>Click to edit Master title style</a:t>
+            </a:r>
+            <a:endParaRPr lang="en-US" dirty="0"/>
+          </a:p>
+        </p:txBody>
+      </p:sp>
+      <p:sp>
+        <p:nvSpPr>
+          <p:cNvPr id="3" name="Vertical Text Placeholder 2"/>
+          <p:cNvSpPr>
+            <a:spLocks noGrp="1"/>
+          </p:cNvSpPr>
+          <p:nvPr>
+            <p:ph type="body" orient="vert" idx="1"/>
+          </p:nvPr>
+        </p:nvSpPr>
+        <p:spPr>
+          <a:xfrm>
+            <a:off x="628650" y="273844"/>
+            <a:ext cx="5800725" cy="4358879"/>
+          </a:xfrm>
+        </p:spPr>
+        <p:txBody>
+          <a:bodyPr vert="eaVert"/>
+          <a:lstStyle/>
+          <a:p>
+            <a:pPr lvl="0"/>
+            <a:r>
+              <a:rPr lang="en-US"/>
+              <a:t>Click to edit Master text styles</a:t>
+            </a:r>
+          </a:p>
+          <a:p>
+            <a:pPr lvl="1"/>
+            <a:r>
+              <a:rPr lang="en-US"/>
+              <a:t>Second level</a:t>
+            </a:r>
+          </a:p>
+          <a:p>
+            <a:pPr lvl="2"/>
+            <a:r>
+              <a:rPr lang="en-US"/>
+              <a:t>Third level</a:t>
+            </a:r>
+          </a:p>
+          <a:p>
+            <a:pPr lvl="3"/>
+            <a:r>
+              <a:rPr lang="en-US"/>
+              <a:t>Fourth level</a:t>
+            </a:r>
+          </a:p>
+          <a:p>
+            <a:pPr lvl="4"/>
+            <a:r>
+              <a:rPr lang="en-US"/>
+              <a:t>Fifth level</a:t>
+            </a:r>
+            <a:endParaRPr lang="en-US" dirty="0"/>
+          </a:p>
+        </p:txBody>
+      </p:sp>
+      <p:sp>
+        <p:nvSpPr>
+          <p:cNvPr id="4" name="Date Placeholder 3"/>
+          <p:cNvSpPr>
+            <a:spLocks noGrp="1"/>
+          </p:cNvSpPr>
+          <p:nvPr>
+            <p:ph type="dt" sz="half" idx="10"/>
+          </p:nvPr>
+        </p:nvSpPr>
+        <p:spPr/>
+        <p:txBody>
+          <a:bodyPr/>
+          <a:lstStyle/>
+          <a:p>
+            <a:fld id="{C764DE79-268F-4C1A-8933-263129D2AF90}" type="datetimeFigureOut">
+              <a:rPr lang="en-US" smtClean="0"/>
+              <a:t>3/10/2026</a:t>
+            </a:fld>
+            <a:endParaRPr lang="en-US" dirty="0"/>
+          </a:p>
+        </p:txBody>
+      </p:sp>
+      <p:sp>
+        <p:nvSpPr>
+          <p:cNvPr id="5" name="Footer Placeholder 4"/>
+          <p:cNvSpPr>
+            <a:spLocks noGrp="1"/>
+          </p:cNvSpPr>
+          <p:nvPr>
+            <p:ph type="ftr" sz="quarter" idx="11"/>
+          </p:nvPr>
+        </p:nvSpPr>
+        <p:spPr/>
+        <p:txBody>
+          <a:bodyPr/>
+          <a:lstStyle/>
+          <a:p>
+            <a:endParaRPr lang="en-US" dirty="0"/>
+          </a:p>
+        </p:txBody>
+      </p:sp>
+      <p:sp>
+        <p:nvSpPr>
+          <p:cNvPr id="6" name="Slide Number Placeholder 5"/>
+          <p:cNvSpPr>
+            <a:spLocks noGrp="1"/>
+          </p:cNvSpPr>
+          <p:nvPr>
+            <p:ph type="sldNum" sz="quarter" idx="12"/>
+          </p:nvPr>
+        </p:nvSpPr>
+        <p:spPr/>
+        <p:txBody>
+          <a:bodyPr/>
+          <a:lstStyle/>
+          <a:p>
+            <a:fld id="{48F63A3B-78C7-47BE-AE5E-E10140E04643}" type="slidenum">
+              <a:rPr lang="en-US" smtClean="0"/>
+              <a:t>‹#›</a:t>
+            </a:fld>
+            <a:endParaRPr lang="en-US" dirty="0"/>
+          </a:p>
+        </p:txBody>
+      </p:sp>
+    </p:spTree>
+    <p:extLst>
+      <p:ext uri="{BB962C8B-B14F-4D97-AF65-F5344CB8AC3E}">
+        <p14:creationId xmlns:p14="http://schemas.microsoft.com/office/powerpoint/2010/main" val="366114425"/>
+      </p:ext>
+    </p:extLst>
+  </p:cSld>
+  <p:clrMapOvr>
+    <a:masterClrMapping/>
+  </p:clrMapOvr>
+  <p:hf sldNum="0" hdr="0" ftr="0" dt="0"/>
+</p:sldLayout>
+</file>
+
+<file path=ppt/slideLayouts/slideLayout12.xml><?xml version="1.0" encoding="utf-8"?>
+<p:sldLayout xmlns:a="http://schemas.openxmlformats.org/drawingml/2006/main" xmlns:r="http://schemas.openxmlformats.org/officeDocument/2006/relationships" xmlns:p="http://schemas.openxmlformats.org/presentationml/2006/main">
   <p:cSld name="DEFAULT">
     <p:bg>
       <p:bgRef idx="1001">
@@ -4690,10 +5175,1785 @@
         </a:xfrm>
       </p:grpSpPr>
     </p:spTree>
+    <p:extLst>
+      <p:ext uri="{BB962C8B-B14F-4D97-AF65-F5344CB8AC3E}">
+        <p14:creationId xmlns:p14="http://schemas.microsoft.com/office/powerpoint/2010/main" val="2611597381"/>
+      </p:ext>
+    </p:extLst>
   </p:cSld>
   <p:clrMapOvr>
     <a:masterClrMapping/>
   </p:clrMapOvr>
+</p:sldLayout>
+</file>
+
+<file path=ppt/slideLayouts/slideLayout2.xml><?xml version="1.0" encoding="utf-8"?>
+<p:sldLayout xmlns:a="http://schemas.openxmlformats.org/drawingml/2006/main" xmlns:r="http://schemas.openxmlformats.org/officeDocument/2006/relationships" xmlns:p="http://schemas.openxmlformats.org/presentationml/2006/main" type="obj" preserve="1">
+  <p:cSld name="Title and Content">
+    <p:spTree>
+      <p:nvGrpSpPr>
+        <p:cNvPr id="1" name=""/>
+        <p:cNvGrpSpPr/>
+        <p:nvPr/>
+      </p:nvGrpSpPr>
+      <p:grpSpPr>
+        <a:xfrm>
+          <a:off x="0" y="0"/>
+          <a:ext cx="0" cy="0"/>
+          <a:chOff x="0" y="0"/>
+          <a:chExt cx="0" cy="0"/>
+        </a:xfrm>
+      </p:grpSpPr>
+      <p:sp>
+        <p:nvSpPr>
+          <p:cNvPr id="2" name="Title 1"/>
+          <p:cNvSpPr>
+            <a:spLocks noGrp="1"/>
+          </p:cNvSpPr>
+          <p:nvPr>
+            <p:ph type="title"/>
+          </p:nvPr>
+        </p:nvSpPr>
+        <p:spPr/>
+        <p:txBody>
+          <a:bodyPr/>
+          <a:lstStyle/>
+          <a:p>
+            <a:r>
+              <a:rPr lang="en-US"/>
+              <a:t>Click to edit Master title style</a:t>
+            </a:r>
+            <a:endParaRPr lang="en-US" dirty="0"/>
+          </a:p>
+        </p:txBody>
+      </p:sp>
+      <p:sp>
+        <p:nvSpPr>
+          <p:cNvPr id="3" name="Content Placeholder 2"/>
+          <p:cNvSpPr>
+            <a:spLocks noGrp="1"/>
+          </p:cNvSpPr>
+          <p:nvPr>
+            <p:ph idx="1"/>
+          </p:nvPr>
+        </p:nvSpPr>
+        <p:spPr/>
+        <p:txBody>
+          <a:bodyPr/>
+          <a:lstStyle/>
+          <a:p>
+            <a:pPr lvl="0"/>
+            <a:r>
+              <a:rPr lang="en-US"/>
+              <a:t>Click to edit Master text styles</a:t>
+            </a:r>
+          </a:p>
+          <a:p>
+            <a:pPr lvl="1"/>
+            <a:r>
+              <a:rPr lang="en-US"/>
+              <a:t>Second level</a:t>
+            </a:r>
+          </a:p>
+          <a:p>
+            <a:pPr lvl="2"/>
+            <a:r>
+              <a:rPr lang="en-US"/>
+              <a:t>Third level</a:t>
+            </a:r>
+          </a:p>
+          <a:p>
+            <a:pPr lvl="3"/>
+            <a:r>
+              <a:rPr lang="en-US"/>
+              <a:t>Fourth level</a:t>
+            </a:r>
+          </a:p>
+          <a:p>
+            <a:pPr lvl="4"/>
+            <a:r>
+              <a:rPr lang="en-US"/>
+              <a:t>Fifth level</a:t>
+            </a:r>
+            <a:endParaRPr lang="en-US" dirty="0"/>
+          </a:p>
+        </p:txBody>
+      </p:sp>
+      <p:sp>
+        <p:nvSpPr>
+          <p:cNvPr id="4" name="Date Placeholder 3"/>
+          <p:cNvSpPr>
+            <a:spLocks noGrp="1"/>
+          </p:cNvSpPr>
+          <p:nvPr>
+            <p:ph type="dt" sz="half" idx="10"/>
+          </p:nvPr>
+        </p:nvSpPr>
+        <p:spPr/>
+        <p:txBody>
+          <a:bodyPr/>
+          <a:lstStyle/>
+          <a:p>
+            <a:fld id="{C764DE79-268F-4C1A-8933-263129D2AF90}" type="datetimeFigureOut">
+              <a:rPr lang="en-US" smtClean="0"/>
+              <a:t>3/10/2026</a:t>
+            </a:fld>
+            <a:endParaRPr lang="en-US" dirty="0"/>
+          </a:p>
+        </p:txBody>
+      </p:sp>
+      <p:sp>
+        <p:nvSpPr>
+          <p:cNvPr id="5" name="Footer Placeholder 4"/>
+          <p:cNvSpPr>
+            <a:spLocks noGrp="1"/>
+          </p:cNvSpPr>
+          <p:nvPr>
+            <p:ph type="ftr" sz="quarter" idx="11"/>
+          </p:nvPr>
+        </p:nvSpPr>
+        <p:spPr/>
+        <p:txBody>
+          <a:bodyPr/>
+          <a:lstStyle/>
+          <a:p>
+            <a:endParaRPr lang="en-US" dirty="0"/>
+          </a:p>
+        </p:txBody>
+      </p:sp>
+      <p:sp>
+        <p:nvSpPr>
+          <p:cNvPr id="6" name="Slide Number Placeholder 5"/>
+          <p:cNvSpPr>
+            <a:spLocks noGrp="1"/>
+          </p:cNvSpPr>
+          <p:nvPr>
+            <p:ph type="sldNum" sz="quarter" idx="12"/>
+          </p:nvPr>
+        </p:nvSpPr>
+        <p:spPr/>
+        <p:txBody>
+          <a:bodyPr/>
+          <a:lstStyle/>
+          <a:p>
+            <a:fld id="{48F63A3B-78C7-47BE-AE5E-E10140E04643}" type="slidenum">
+              <a:rPr lang="en-US" smtClean="0"/>
+              <a:t>‹#›</a:t>
+            </a:fld>
+            <a:endParaRPr lang="en-US" dirty="0"/>
+          </a:p>
+        </p:txBody>
+      </p:sp>
+    </p:spTree>
+    <p:extLst>
+      <p:ext uri="{BB962C8B-B14F-4D97-AF65-F5344CB8AC3E}">
+        <p14:creationId xmlns:p14="http://schemas.microsoft.com/office/powerpoint/2010/main" val="2871417805"/>
+      </p:ext>
+    </p:extLst>
+  </p:cSld>
+  <p:clrMapOvr>
+    <a:masterClrMapping/>
+  </p:clrMapOvr>
+  <p:hf sldNum="0" hdr="0" ftr="0" dt="0"/>
+</p:sldLayout>
+</file>
+
+<file path=ppt/slideLayouts/slideLayout3.xml><?xml version="1.0" encoding="utf-8"?>
+<p:sldLayout xmlns:a="http://schemas.openxmlformats.org/drawingml/2006/main" xmlns:r="http://schemas.openxmlformats.org/officeDocument/2006/relationships" xmlns:p="http://schemas.openxmlformats.org/presentationml/2006/main" type="secHead" preserve="1">
+  <p:cSld name="Section Header">
+    <p:spTree>
+      <p:nvGrpSpPr>
+        <p:cNvPr id="1" name=""/>
+        <p:cNvGrpSpPr/>
+        <p:nvPr/>
+      </p:nvGrpSpPr>
+      <p:grpSpPr>
+        <a:xfrm>
+          <a:off x="0" y="0"/>
+          <a:ext cx="0" cy="0"/>
+          <a:chOff x="0" y="0"/>
+          <a:chExt cx="0" cy="0"/>
+        </a:xfrm>
+      </p:grpSpPr>
+      <p:sp>
+        <p:nvSpPr>
+          <p:cNvPr id="2" name="Title 1"/>
+          <p:cNvSpPr>
+            <a:spLocks noGrp="1"/>
+          </p:cNvSpPr>
+          <p:nvPr>
+            <p:ph type="title"/>
+          </p:nvPr>
+        </p:nvSpPr>
+        <p:spPr>
+          <a:xfrm>
+            <a:off x="623888" y="1282304"/>
+            <a:ext cx="7886700" cy="2139553"/>
+          </a:xfrm>
+        </p:spPr>
+        <p:txBody>
+          <a:bodyPr anchor="b"/>
+          <a:lstStyle>
+            <a:lvl1pPr>
+              <a:defRPr sz="4500"/>
+            </a:lvl1pPr>
+          </a:lstStyle>
+          <a:p>
+            <a:r>
+              <a:rPr lang="en-US"/>
+              <a:t>Click to edit Master title style</a:t>
+            </a:r>
+            <a:endParaRPr lang="en-US" dirty="0"/>
+          </a:p>
+        </p:txBody>
+      </p:sp>
+      <p:sp>
+        <p:nvSpPr>
+          <p:cNvPr id="3" name="Text Placeholder 2"/>
+          <p:cNvSpPr>
+            <a:spLocks noGrp="1"/>
+          </p:cNvSpPr>
+          <p:nvPr>
+            <p:ph type="body" idx="1"/>
+          </p:nvPr>
+        </p:nvSpPr>
+        <p:spPr>
+          <a:xfrm>
+            <a:off x="623888" y="3442098"/>
+            <a:ext cx="7886700" cy="1125140"/>
+          </a:xfrm>
+        </p:spPr>
+        <p:txBody>
+          <a:bodyPr/>
+          <a:lstStyle>
+            <a:lvl1pPr marL="0" indent="0">
+              <a:buNone/>
+              <a:defRPr sz="1800">
+                <a:solidFill>
+                  <a:schemeClr val="tx1">
+                    <a:tint val="75000"/>
+                  </a:schemeClr>
+                </a:solidFill>
+              </a:defRPr>
+            </a:lvl1pPr>
+            <a:lvl2pPr marL="342900" indent="0">
+              <a:buNone/>
+              <a:defRPr sz="1500">
+                <a:solidFill>
+                  <a:schemeClr val="tx1">
+                    <a:tint val="75000"/>
+                  </a:schemeClr>
+                </a:solidFill>
+              </a:defRPr>
+            </a:lvl2pPr>
+            <a:lvl3pPr marL="685800" indent="0">
+              <a:buNone/>
+              <a:defRPr sz="1350">
+                <a:solidFill>
+                  <a:schemeClr val="tx1">
+                    <a:tint val="75000"/>
+                  </a:schemeClr>
+                </a:solidFill>
+              </a:defRPr>
+            </a:lvl3pPr>
+            <a:lvl4pPr marL="1028700" indent="0">
+              <a:buNone/>
+              <a:defRPr sz="1200">
+                <a:solidFill>
+                  <a:schemeClr val="tx1">
+                    <a:tint val="75000"/>
+                  </a:schemeClr>
+                </a:solidFill>
+              </a:defRPr>
+            </a:lvl4pPr>
+            <a:lvl5pPr marL="1371600" indent="0">
+              <a:buNone/>
+              <a:defRPr sz="1200">
+                <a:solidFill>
+                  <a:schemeClr val="tx1">
+                    <a:tint val="75000"/>
+                  </a:schemeClr>
+                </a:solidFill>
+              </a:defRPr>
+            </a:lvl5pPr>
+            <a:lvl6pPr marL="1714500" indent="0">
+              <a:buNone/>
+              <a:defRPr sz="1200">
+                <a:solidFill>
+                  <a:schemeClr val="tx1">
+                    <a:tint val="75000"/>
+                  </a:schemeClr>
+                </a:solidFill>
+              </a:defRPr>
+            </a:lvl6pPr>
+            <a:lvl7pPr marL="2057400" indent="0">
+              <a:buNone/>
+              <a:defRPr sz="1200">
+                <a:solidFill>
+                  <a:schemeClr val="tx1">
+                    <a:tint val="75000"/>
+                  </a:schemeClr>
+                </a:solidFill>
+              </a:defRPr>
+            </a:lvl7pPr>
+            <a:lvl8pPr marL="2400300" indent="0">
+              <a:buNone/>
+              <a:defRPr sz="1200">
+                <a:solidFill>
+                  <a:schemeClr val="tx1">
+                    <a:tint val="75000"/>
+                  </a:schemeClr>
+                </a:solidFill>
+              </a:defRPr>
+            </a:lvl8pPr>
+            <a:lvl9pPr marL="2743200" indent="0">
+              <a:buNone/>
+              <a:defRPr sz="1200">
+                <a:solidFill>
+                  <a:schemeClr val="tx1">
+                    <a:tint val="75000"/>
+                  </a:schemeClr>
+                </a:solidFill>
+              </a:defRPr>
+            </a:lvl9pPr>
+          </a:lstStyle>
+          <a:p>
+            <a:pPr lvl="0"/>
+            <a:r>
+              <a:rPr lang="en-US"/>
+              <a:t>Click to edit Master text styles</a:t>
+            </a:r>
+          </a:p>
+        </p:txBody>
+      </p:sp>
+      <p:sp>
+        <p:nvSpPr>
+          <p:cNvPr id="4" name="Date Placeholder 3"/>
+          <p:cNvSpPr>
+            <a:spLocks noGrp="1"/>
+          </p:cNvSpPr>
+          <p:nvPr>
+            <p:ph type="dt" sz="half" idx="10"/>
+          </p:nvPr>
+        </p:nvSpPr>
+        <p:spPr/>
+        <p:txBody>
+          <a:bodyPr/>
+          <a:lstStyle/>
+          <a:p>
+            <a:fld id="{C764DE79-268F-4C1A-8933-263129D2AF90}" type="datetimeFigureOut">
+              <a:rPr lang="en-US" smtClean="0"/>
+              <a:t>3/10/2026</a:t>
+            </a:fld>
+            <a:endParaRPr lang="en-US" dirty="0"/>
+          </a:p>
+        </p:txBody>
+      </p:sp>
+      <p:sp>
+        <p:nvSpPr>
+          <p:cNvPr id="5" name="Footer Placeholder 4"/>
+          <p:cNvSpPr>
+            <a:spLocks noGrp="1"/>
+          </p:cNvSpPr>
+          <p:nvPr>
+            <p:ph type="ftr" sz="quarter" idx="11"/>
+          </p:nvPr>
+        </p:nvSpPr>
+        <p:spPr/>
+        <p:txBody>
+          <a:bodyPr/>
+          <a:lstStyle/>
+          <a:p>
+            <a:endParaRPr lang="en-US" dirty="0"/>
+          </a:p>
+        </p:txBody>
+      </p:sp>
+      <p:sp>
+        <p:nvSpPr>
+          <p:cNvPr id="6" name="Slide Number Placeholder 5"/>
+          <p:cNvSpPr>
+            <a:spLocks noGrp="1"/>
+          </p:cNvSpPr>
+          <p:nvPr>
+            <p:ph type="sldNum" sz="quarter" idx="12"/>
+          </p:nvPr>
+        </p:nvSpPr>
+        <p:spPr/>
+        <p:txBody>
+          <a:bodyPr/>
+          <a:lstStyle/>
+          <a:p>
+            <a:fld id="{48F63A3B-78C7-47BE-AE5E-E10140E04643}" type="slidenum">
+              <a:rPr lang="en-US" smtClean="0"/>
+              <a:t>‹#›</a:t>
+            </a:fld>
+            <a:endParaRPr lang="en-US" dirty="0"/>
+          </a:p>
+        </p:txBody>
+      </p:sp>
+    </p:spTree>
+    <p:extLst>
+      <p:ext uri="{BB962C8B-B14F-4D97-AF65-F5344CB8AC3E}">
+        <p14:creationId xmlns:p14="http://schemas.microsoft.com/office/powerpoint/2010/main" val="798904868"/>
+      </p:ext>
+    </p:extLst>
+  </p:cSld>
+  <p:clrMapOvr>
+    <a:masterClrMapping/>
+  </p:clrMapOvr>
+  <p:hf sldNum="0" hdr="0" ftr="0" dt="0"/>
+</p:sldLayout>
+</file>
+
+<file path=ppt/slideLayouts/slideLayout4.xml><?xml version="1.0" encoding="utf-8"?>
+<p:sldLayout xmlns:a="http://schemas.openxmlformats.org/drawingml/2006/main" xmlns:r="http://schemas.openxmlformats.org/officeDocument/2006/relationships" xmlns:p="http://schemas.openxmlformats.org/presentationml/2006/main" type="twoObj" preserve="1">
+  <p:cSld name="Two Content">
+    <p:spTree>
+      <p:nvGrpSpPr>
+        <p:cNvPr id="1" name=""/>
+        <p:cNvGrpSpPr/>
+        <p:nvPr/>
+      </p:nvGrpSpPr>
+      <p:grpSpPr>
+        <a:xfrm>
+          <a:off x="0" y="0"/>
+          <a:ext cx="0" cy="0"/>
+          <a:chOff x="0" y="0"/>
+          <a:chExt cx="0" cy="0"/>
+        </a:xfrm>
+      </p:grpSpPr>
+      <p:sp>
+        <p:nvSpPr>
+          <p:cNvPr id="2" name="Title 1"/>
+          <p:cNvSpPr>
+            <a:spLocks noGrp="1"/>
+          </p:cNvSpPr>
+          <p:nvPr>
+            <p:ph type="title"/>
+          </p:nvPr>
+        </p:nvSpPr>
+        <p:spPr/>
+        <p:txBody>
+          <a:bodyPr/>
+          <a:lstStyle/>
+          <a:p>
+            <a:r>
+              <a:rPr lang="en-US"/>
+              <a:t>Click to edit Master title style</a:t>
+            </a:r>
+            <a:endParaRPr lang="en-US" dirty="0"/>
+          </a:p>
+        </p:txBody>
+      </p:sp>
+      <p:sp>
+        <p:nvSpPr>
+          <p:cNvPr id="3" name="Content Placeholder 2"/>
+          <p:cNvSpPr>
+            <a:spLocks noGrp="1"/>
+          </p:cNvSpPr>
+          <p:nvPr>
+            <p:ph sz="half" idx="1"/>
+          </p:nvPr>
+        </p:nvSpPr>
+        <p:spPr>
+          <a:xfrm>
+            <a:off x="628650" y="1369219"/>
+            <a:ext cx="3886200" cy="3263504"/>
+          </a:xfrm>
+        </p:spPr>
+        <p:txBody>
+          <a:bodyPr/>
+          <a:lstStyle/>
+          <a:p>
+            <a:pPr lvl="0"/>
+            <a:r>
+              <a:rPr lang="en-US"/>
+              <a:t>Click to edit Master text styles</a:t>
+            </a:r>
+          </a:p>
+          <a:p>
+            <a:pPr lvl="1"/>
+            <a:r>
+              <a:rPr lang="en-US"/>
+              <a:t>Second level</a:t>
+            </a:r>
+          </a:p>
+          <a:p>
+            <a:pPr lvl="2"/>
+            <a:r>
+              <a:rPr lang="en-US"/>
+              <a:t>Third level</a:t>
+            </a:r>
+          </a:p>
+          <a:p>
+            <a:pPr lvl="3"/>
+            <a:r>
+              <a:rPr lang="en-US"/>
+              <a:t>Fourth level</a:t>
+            </a:r>
+          </a:p>
+          <a:p>
+            <a:pPr lvl="4"/>
+            <a:r>
+              <a:rPr lang="en-US"/>
+              <a:t>Fifth level</a:t>
+            </a:r>
+            <a:endParaRPr lang="en-US" dirty="0"/>
+          </a:p>
+        </p:txBody>
+      </p:sp>
+      <p:sp>
+        <p:nvSpPr>
+          <p:cNvPr id="4" name="Content Placeholder 3"/>
+          <p:cNvSpPr>
+            <a:spLocks noGrp="1"/>
+          </p:cNvSpPr>
+          <p:nvPr>
+            <p:ph sz="half" idx="2"/>
+          </p:nvPr>
+        </p:nvSpPr>
+        <p:spPr>
+          <a:xfrm>
+            <a:off x="4629150" y="1369219"/>
+            <a:ext cx="3886200" cy="3263504"/>
+          </a:xfrm>
+        </p:spPr>
+        <p:txBody>
+          <a:bodyPr/>
+          <a:lstStyle/>
+          <a:p>
+            <a:pPr lvl="0"/>
+            <a:r>
+              <a:rPr lang="en-US"/>
+              <a:t>Click to edit Master text styles</a:t>
+            </a:r>
+          </a:p>
+          <a:p>
+            <a:pPr lvl="1"/>
+            <a:r>
+              <a:rPr lang="en-US"/>
+              <a:t>Second level</a:t>
+            </a:r>
+          </a:p>
+          <a:p>
+            <a:pPr lvl="2"/>
+            <a:r>
+              <a:rPr lang="en-US"/>
+              <a:t>Third level</a:t>
+            </a:r>
+          </a:p>
+          <a:p>
+            <a:pPr lvl="3"/>
+            <a:r>
+              <a:rPr lang="en-US"/>
+              <a:t>Fourth level</a:t>
+            </a:r>
+          </a:p>
+          <a:p>
+            <a:pPr lvl="4"/>
+            <a:r>
+              <a:rPr lang="en-US"/>
+              <a:t>Fifth level</a:t>
+            </a:r>
+            <a:endParaRPr lang="en-US" dirty="0"/>
+          </a:p>
+        </p:txBody>
+      </p:sp>
+      <p:sp>
+        <p:nvSpPr>
+          <p:cNvPr id="5" name="Date Placeholder 4"/>
+          <p:cNvSpPr>
+            <a:spLocks noGrp="1"/>
+          </p:cNvSpPr>
+          <p:nvPr>
+            <p:ph type="dt" sz="half" idx="10"/>
+          </p:nvPr>
+        </p:nvSpPr>
+        <p:spPr/>
+        <p:txBody>
+          <a:bodyPr/>
+          <a:lstStyle/>
+          <a:p>
+            <a:fld id="{C764DE79-268F-4C1A-8933-263129D2AF90}" type="datetimeFigureOut">
+              <a:rPr lang="en-US" smtClean="0"/>
+              <a:t>3/10/2026</a:t>
+            </a:fld>
+            <a:endParaRPr lang="en-US" dirty="0"/>
+          </a:p>
+        </p:txBody>
+      </p:sp>
+      <p:sp>
+        <p:nvSpPr>
+          <p:cNvPr id="6" name="Footer Placeholder 5"/>
+          <p:cNvSpPr>
+            <a:spLocks noGrp="1"/>
+          </p:cNvSpPr>
+          <p:nvPr>
+            <p:ph type="ftr" sz="quarter" idx="11"/>
+          </p:nvPr>
+        </p:nvSpPr>
+        <p:spPr/>
+        <p:txBody>
+          <a:bodyPr/>
+          <a:lstStyle/>
+          <a:p>
+            <a:endParaRPr lang="en-US" dirty="0"/>
+          </a:p>
+        </p:txBody>
+      </p:sp>
+      <p:sp>
+        <p:nvSpPr>
+          <p:cNvPr id="7" name="Slide Number Placeholder 6"/>
+          <p:cNvSpPr>
+            <a:spLocks noGrp="1"/>
+          </p:cNvSpPr>
+          <p:nvPr>
+            <p:ph type="sldNum" sz="quarter" idx="12"/>
+          </p:nvPr>
+        </p:nvSpPr>
+        <p:spPr/>
+        <p:txBody>
+          <a:bodyPr/>
+          <a:lstStyle/>
+          <a:p>
+            <a:fld id="{48F63A3B-78C7-47BE-AE5E-E10140E04643}" type="slidenum">
+              <a:rPr lang="en-US" smtClean="0"/>
+              <a:t>‹#›</a:t>
+            </a:fld>
+            <a:endParaRPr lang="en-US" dirty="0"/>
+          </a:p>
+        </p:txBody>
+      </p:sp>
+    </p:spTree>
+    <p:extLst>
+      <p:ext uri="{BB962C8B-B14F-4D97-AF65-F5344CB8AC3E}">
+        <p14:creationId xmlns:p14="http://schemas.microsoft.com/office/powerpoint/2010/main" val="1825403939"/>
+      </p:ext>
+    </p:extLst>
+  </p:cSld>
+  <p:clrMapOvr>
+    <a:masterClrMapping/>
+  </p:clrMapOvr>
+  <p:hf sldNum="0" hdr="0" ftr="0" dt="0"/>
+</p:sldLayout>
+</file>
+
+<file path=ppt/slideLayouts/slideLayout5.xml><?xml version="1.0" encoding="utf-8"?>
+<p:sldLayout xmlns:a="http://schemas.openxmlformats.org/drawingml/2006/main" xmlns:r="http://schemas.openxmlformats.org/officeDocument/2006/relationships" xmlns:p="http://schemas.openxmlformats.org/presentationml/2006/main" type="twoTxTwoObj" preserve="1">
+  <p:cSld name="Comparison">
+    <p:spTree>
+      <p:nvGrpSpPr>
+        <p:cNvPr id="1" name=""/>
+        <p:cNvGrpSpPr/>
+        <p:nvPr/>
+      </p:nvGrpSpPr>
+      <p:grpSpPr>
+        <a:xfrm>
+          <a:off x="0" y="0"/>
+          <a:ext cx="0" cy="0"/>
+          <a:chOff x="0" y="0"/>
+          <a:chExt cx="0" cy="0"/>
+        </a:xfrm>
+      </p:grpSpPr>
+      <p:sp>
+        <p:nvSpPr>
+          <p:cNvPr id="2" name="Title 1"/>
+          <p:cNvSpPr>
+            <a:spLocks noGrp="1"/>
+          </p:cNvSpPr>
+          <p:nvPr>
+            <p:ph type="title"/>
+          </p:nvPr>
+        </p:nvSpPr>
+        <p:spPr>
+          <a:xfrm>
+            <a:off x="629841" y="273844"/>
+            <a:ext cx="7886700" cy="994172"/>
+          </a:xfrm>
+        </p:spPr>
+        <p:txBody>
+          <a:bodyPr/>
+          <a:lstStyle/>
+          <a:p>
+            <a:r>
+              <a:rPr lang="en-US"/>
+              <a:t>Click to edit Master title style</a:t>
+            </a:r>
+            <a:endParaRPr lang="en-US" dirty="0"/>
+          </a:p>
+        </p:txBody>
+      </p:sp>
+      <p:sp>
+        <p:nvSpPr>
+          <p:cNvPr id="3" name="Text Placeholder 2"/>
+          <p:cNvSpPr>
+            <a:spLocks noGrp="1"/>
+          </p:cNvSpPr>
+          <p:nvPr>
+            <p:ph type="body" idx="1"/>
+          </p:nvPr>
+        </p:nvSpPr>
+        <p:spPr>
+          <a:xfrm>
+            <a:off x="629842" y="1260872"/>
+            <a:ext cx="3868340" cy="617934"/>
+          </a:xfrm>
+        </p:spPr>
+        <p:txBody>
+          <a:bodyPr anchor="b"/>
+          <a:lstStyle>
+            <a:lvl1pPr marL="0" indent="0">
+              <a:buNone/>
+              <a:defRPr sz="1800" b="1"/>
+            </a:lvl1pPr>
+            <a:lvl2pPr marL="342900" indent="0">
+              <a:buNone/>
+              <a:defRPr sz="1500" b="1"/>
+            </a:lvl2pPr>
+            <a:lvl3pPr marL="685800" indent="0">
+              <a:buNone/>
+              <a:defRPr sz="1350" b="1"/>
+            </a:lvl3pPr>
+            <a:lvl4pPr marL="1028700" indent="0">
+              <a:buNone/>
+              <a:defRPr sz="1200" b="1"/>
+            </a:lvl4pPr>
+            <a:lvl5pPr marL="1371600" indent="0">
+              <a:buNone/>
+              <a:defRPr sz="1200" b="1"/>
+            </a:lvl5pPr>
+            <a:lvl6pPr marL="1714500" indent="0">
+              <a:buNone/>
+              <a:defRPr sz="1200" b="1"/>
+            </a:lvl6pPr>
+            <a:lvl7pPr marL="2057400" indent="0">
+              <a:buNone/>
+              <a:defRPr sz="1200" b="1"/>
+            </a:lvl7pPr>
+            <a:lvl8pPr marL="2400300" indent="0">
+              <a:buNone/>
+              <a:defRPr sz="1200" b="1"/>
+            </a:lvl8pPr>
+            <a:lvl9pPr marL="2743200" indent="0">
+              <a:buNone/>
+              <a:defRPr sz="1200" b="1"/>
+            </a:lvl9pPr>
+          </a:lstStyle>
+          <a:p>
+            <a:pPr lvl="0"/>
+            <a:r>
+              <a:rPr lang="en-US"/>
+              <a:t>Click to edit Master text styles</a:t>
+            </a:r>
+          </a:p>
+        </p:txBody>
+      </p:sp>
+      <p:sp>
+        <p:nvSpPr>
+          <p:cNvPr id="4" name="Content Placeholder 3"/>
+          <p:cNvSpPr>
+            <a:spLocks noGrp="1"/>
+          </p:cNvSpPr>
+          <p:nvPr>
+            <p:ph sz="half" idx="2"/>
+          </p:nvPr>
+        </p:nvSpPr>
+        <p:spPr>
+          <a:xfrm>
+            <a:off x="629842" y="1878806"/>
+            <a:ext cx="3868340" cy="2763441"/>
+          </a:xfrm>
+        </p:spPr>
+        <p:txBody>
+          <a:bodyPr/>
+          <a:lstStyle/>
+          <a:p>
+            <a:pPr lvl="0"/>
+            <a:r>
+              <a:rPr lang="en-US"/>
+              <a:t>Click to edit Master text styles</a:t>
+            </a:r>
+          </a:p>
+          <a:p>
+            <a:pPr lvl="1"/>
+            <a:r>
+              <a:rPr lang="en-US"/>
+              <a:t>Second level</a:t>
+            </a:r>
+          </a:p>
+          <a:p>
+            <a:pPr lvl="2"/>
+            <a:r>
+              <a:rPr lang="en-US"/>
+              <a:t>Third level</a:t>
+            </a:r>
+          </a:p>
+          <a:p>
+            <a:pPr lvl="3"/>
+            <a:r>
+              <a:rPr lang="en-US"/>
+              <a:t>Fourth level</a:t>
+            </a:r>
+          </a:p>
+          <a:p>
+            <a:pPr lvl="4"/>
+            <a:r>
+              <a:rPr lang="en-US"/>
+              <a:t>Fifth level</a:t>
+            </a:r>
+            <a:endParaRPr lang="en-US" dirty="0"/>
+          </a:p>
+        </p:txBody>
+      </p:sp>
+      <p:sp>
+        <p:nvSpPr>
+          <p:cNvPr id="5" name="Text Placeholder 4"/>
+          <p:cNvSpPr>
+            <a:spLocks noGrp="1"/>
+          </p:cNvSpPr>
+          <p:nvPr>
+            <p:ph type="body" sz="quarter" idx="3"/>
+          </p:nvPr>
+        </p:nvSpPr>
+        <p:spPr>
+          <a:xfrm>
+            <a:off x="4629150" y="1260872"/>
+            <a:ext cx="3887391" cy="617934"/>
+          </a:xfrm>
+        </p:spPr>
+        <p:txBody>
+          <a:bodyPr anchor="b"/>
+          <a:lstStyle>
+            <a:lvl1pPr marL="0" indent="0">
+              <a:buNone/>
+              <a:defRPr sz="1800" b="1"/>
+            </a:lvl1pPr>
+            <a:lvl2pPr marL="342900" indent="0">
+              <a:buNone/>
+              <a:defRPr sz="1500" b="1"/>
+            </a:lvl2pPr>
+            <a:lvl3pPr marL="685800" indent="0">
+              <a:buNone/>
+              <a:defRPr sz="1350" b="1"/>
+            </a:lvl3pPr>
+            <a:lvl4pPr marL="1028700" indent="0">
+              <a:buNone/>
+              <a:defRPr sz="1200" b="1"/>
+            </a:lvl4pPr>
+            <a:lvl5pPr marL="1371600" indent="0">
+              <a:buNone/>
+              <a:defRPr sz="1200" b="1"/>
+            </a:lvl5pPr>
+            <a:lvl6pPr marL="1714500" indent="0">
+              <a:buNone/>
+              <a:defRPr sz="1200" b="1"/>
+            </a:lvl6pPr>
+            <a:lvl7pPr marL="2057400" indent="0">
+              <a:buNone/>
+              <a:defRPr sz="1200" b="1"/>
+            </a:lvl7pPr>
+            <a:lvl8pPr marL="2400300" indent="0">
+              <a:buNone/>
+              <a:defRPr sz="1200" b="1"/>
+            </a:lvl8pPr>
+            <a:lvl9pPr marL="2743200" indent="0">
+              <a:buNone/>
+              <a:defRPr sz="1200" b="1"/>
+            </a:lvl9pPr>
+          </a:lstStyle>
+          <a:p>
+            <a:pPr lvl="0"/>
+            <a:r>
+              <a:rPr lang="en-US"/>
+              <a:t>Click to edit Master text styles</a:t>
+            </a:r>
+          </a:p>
+        </p:txBody>
+      </p:sp>
+      <p:sp>
+        <p:nvSpPr>
+          <p:cNvPr id="6" name="Content Placeholder 5"/>
+          <p:cNvSpPr>
+            <a:spLocks noGrp="1"/>
+          </p:cNvSpPr>
+          <p:nvPr>
+            <p:ph sz="quarter" idx="4"/>
+          </p:nvPr>
+        </p:nvSpPr>
+        <p:spPr>
+          <a:xfrm>
+            <a:off x="4629150" y="1878806"/>
+            <a:ext cx="3887391" cy="2763441"/>
+          </a:xfrm>
+        </p:spPr>
+        <p:txBody>
+          <a:bodyPr/>
+          <a:lstStyle/>
+          <a:p>
+            <a:pPr lvl="0"/>
+            <a:r>
+              <a:rPr lang="en-US"/>
+              <a:t>Click to edit Master text styles</a:t>
+            </a:r>
+          </a:p>
+          <a:p>
+            <a:pPr lvl="1"/>
+            <a:r>
+              <a:rPr lang="en-US"/>
+              <a:t>Second level</a:t>
+            </a:r>
+          </a:p>
+          <a:p>
+            <a:pPr lvl="2"/>
+            <a:r>
+              <a:rPr lang="en-US"/>
+              <a:t>Third level</a:t>
+            </a:r>
+          </a:p>
+          <a:p>
+            <a:pPr lvl="3"/>
+            <a:r>
+              <a:rPr lang="en-US"/>
+              <a:t>Fourth level</a:t>
+            </a:r>
+          </a:p>
+          <a:p>
+            <a:pPr lvl="4"/>
+            <a:r>
+              <a:rPr lang="en-US"/>
+              <a:t>Fifth level</a:t>
+            </a:r>
+            <a:endParaRPr lang="en-US" dirty="0"/>
+          </a:p>
+        </p:txBody>
+      </p:sp>
+      <p:sp>
+        <p:nvSpPr>
+          <p:cNvPr id="7" name="Date Placeholder 6"/>
+          <p:cNvSpPr>
+            <a:spLocks noGrp="1"/>
+          </p:cNvSpPr>
+          <p:nvPr>
+            <p:ph type="dt" sz="half" idx="10"/>
+          </p:nvPr>
+        </p:nvSpPr>
+        <p:spPr/>
+        <p:txBody>
+          <a:bodyPr/>
+          <a:lstStyle/>
+          <a:p>
+            <a:fld id="{C764DE79-268F-4C1A-8933-263129D2AF90}" type="datetimeFigureOut">
+              <a:rPr lang="en-US" smtClean="0"/>
+              <a:t>3/10/2026</a:t>
+            </a:fld>
+            <a:endParaRPr lang="en-US" dirty="0"/>
+          </a:p>
+        </p:txBody>
+      </p:sp>
+      <p:sp>
+        <p:nvSpPr>
+          <p:cNvPr id="8" name="Footer Placeholder 7"/>
+          <p:cNvSpPr>
+            <a:spLocks noGrp="1"/>
+          </p:cNvSpPr>
+          <p:nvPr>
+            <p:ph type="ftr" sz="quarter" idx="11"/>
+          </p:nvPr>
+        </p:nvSpPr>
+        <p:spPr/>
+        <p:txBody>
+          <a:bodyPr/>
+          <a:lstStyle/>
+          <a:p>
+            <a:endParaRPr lang="en-US" dirty="0"/>
+          </a:p>
+        </p:txBody>
+      </p:sp>
+      <p:sp>
+        <p:nvSpPr>
+          <p:cNvPr id="9" name="Slide Number Placeholder 8"/>
+          <p:cNvSpPr>
+            <a:spLocks noGrp="1"/>
+          </p:cNvSpPr>
+          <p:nvPr>
+            <p:ph type="sldNum" sz="quarter" idx="12"/>
+          </p:nvPr>
+        </p:nvSpPr>
+        <p:spPr/>
+        <p:txBody>
+          <a:bodyPr/>
+          <a:lstStyle/>
+          <a:p>
+            <a:fld id="{48F63A3B-78C7-47BE-AE5E-E10140E04643}" type="slidenum">
+              <a:rPr lang="en-US" smtClean="0"/>
+              <a:t>‹#›</a:t>
+            </a:fld>
+            <a:endParaRPr lang="en-US" dirty="0"/>
+          </a:p>
+        </p:txBody>
+      </p:sp>
+    </p:spTree>
+    <p:extLst>
+      <p:ext uri="{BB962C8B-B14F-4D97-AF65-F5344CB8AC3E}">
+        <p14:creationId xmlns:p14="http://schemas.microsoft.com/office/powerpoint/2010/main" val="4043295702"/>
+      </p:ext>
+    </p:extLst>
+  </p:cSld>
+  <p:clrMapOvr>
+    <a:masterClrMapping/>
+  </p:clrMapOvr>
+  <p:hf sldNum="0" hdr="0" ftr="0" dt="0"/>
+</p:sldLayout>
+</file>
+
+<file path=ppt/slideLayouts/slideLayout6.xml><?xml version="1.0" encoding="utf-8"?>
+<p:sldLayout xmlns:a="http://schemas.openxmlformats.org/drawingml/2006/main" xmlns:r="http://schemas.openxmlformats.org/officeDocument/2006/relationships" xmlns:p="http://schemas.openxmlformats.org/presentationml/2006/main" type="titleOnly" preserve="1">
+  <p:cSld name="Title Only">
+    <p:spTree>
+      <p:nvGrpSpPr>
+        <p:cNvPr id="1" name=""/>
+        <p:cNvGrpSpPr/>
+        <p:nvPr/>
+      </p:nvGrpSpPr>
+      <p:grpSpPr>
+        <a:xfrm>
+          <a:off x="0" y="0"/>
+          <a:ext cx="0" cy="0"/>
+          <a:chOff x="0" y="0"/>
+          <a:chExt cx="0" cy="0"/>
+        </a:xfrm>
+      </p:grpSpPr>
+      <p:sp>
+        <p:nvSpPr>
+          <p:cNvPr id="2" name="Title 1"/>
+          <p:cNvSpPr>
+            <a:spLocks noGrp="1"/>
+          </p:cNvSpPr>
+          <p:nvPr>
+            <p:ph type="title"/>
+          </p:nvPr>
+        </p:nvSpPr>
+        <p:spPr/>
+        <p:txBody>
+          <a:bodyPr/>
+          <a:lstStyle/>
+          <a:p>
+            <a:r>
+              <a:rPr lang="en-US"/>
+              <a:t>Click to edit Master title style</a:t>
+            </a:r>
+            <a:endParaRPr lang="en-US" dirty="0"/>
+          </a:p>
+        </p:txBody>
+      </p:sp>
+      <p:sp>
+        <p:nvSpPr>
+          <p:cNvPr id="3" name="Date Placeholder 2"/>
+          <p:cNvSpPr>
+            <a:spLocks noGrp="1"/>
+          </p:cNvSpPr>
+          <p:nvPr>
+            <p:ph type="dt" sz="half" idx="10"/>
+          </p:nvPr>
+        </p:nvSpPr>
+        <p:spPr/>
+        <p:txBody>
+          <a:bodyPr/>
+          <a:lstStyle/>
+          <a:p>
+            <a:fld id="{C764DE79-268F-4C1A-8933-263129D2AF90}" type="datetimeFigureOut">
+              <a:rPr lang="en-US" smtClean="0"/>
+              <a:t>3/10/2026</a:t>
+            </a:fld>
+            <a:endParaRPr lang="en-US" dirty="0"/>
+          </a:p>
+        </p:txBody>
+      </p:sp>
+      <p:sp>
+        <p:nvSpPr>
+          <p:cNvPr id="4" name="Footer Placeholder 3"/>
+          <p:cNvSpPr>
+            <a:spLocks noGrp="1"/>
+          </p:cNvSpPr>
+          <p:nvPr>
+            <p:ph type="ftr" sz="quarter" idx="11"/>
+          </p:nvPr>
+        </p:nvSpPr>
+        <p:spPr/>
+        <p:txBody>
+          <a:bodyPr/>
+          <a:lstStyle/>
+          <a:p>
+            <a:endParaRPr lang="en-US" dirty="0"/>
+          </a:p>
+        </p:txBody>
+      </p:sp>
+      <p:sp>
+        <p:nvSpPr>
+          <p:cNvPr id="5" name="Slide Number Placeholder 4"/>
+          <p:cNvSpPr>
+            <a:spLocks noGrp="1"/>
+          </p:cNvSpPr>
+          <p:nvPr>
+            <p:ph type="sldNum" sz="quarter" idx="12"/>
+          </p:nvPr>
+        </p:nvSpPr>
+        <p:spPr/>
+        <p:txBody>
+          <a:bodyPr/>
+          <a:lstStyle/>
+          <a:p>
+            <a:fld id="{48F63A3B-78C7-47BE-AE5E-E10140E04643}" type="slidenum">
+              <a:rPr lang="en-US" smtClean="0"/>
+              <a:t>‹#›</a:t>
+            </a:fld>
+            <a:endParaRPr lang="en-US" dirty="0"/>
+          </a:p>
+        </p:txBody>
+      </p:sp>
+    </p:spTree>
+    <p:extLst>
+      <p:ext uri="{BB962C8B-B14F-4D97-AF65-F5344CB8AC3E}">
+        <p14:creationId xmlns:p14="http://schemas.microsoft.com/office/powerpoint/2010/main" val="791525804"/>
+      </p:ext>
+    </p:extLst>
+  </p:cSld>
+  <p:clrMapOvr>
+    <a:masterClrMapping/>
+  </p:clrMapOvr>
+  <p:hf sldNum="0" hdr="0" ftr="0" dt="0"/>
+</p:sldLayout>
+</file>
+
+<file path=ppt/slideLayouts/slideLayout7.xml><?xml version="1.0" encoding="utf-8"?>
+<p:sldLayout xmlns:a="http://schemas.openxmlformats.org/drawingml/2006/main" xmlns:r="http://schemas.openxmlformats.org/officeDocument/2006/relationships" xmlns:p="http://schemas.openxmlformats.org/presentationml/2006/main" type="blank" preserve="1">
+  <p:cSld name="Blank">
+    <p:spTree>
+      <p:nvGrpSpPr>
+        <p:cNvPr id="1" name=""/>
+        <p:cNvGrpSpPr/>
+        <p:nvPr/>
+      </p:nvGrpSpPr>
+      <p:grpSpPr>
+        <a:xfrm>
+          <a:off x="0" y="0"/>
+          <a:ext cx="0" cy="0"/>
+          <a:chOff x="0" y="0"/>
+          <a:chExt cx="0" cy="0"/>
+        </a:xfrm>
+      </p:grpSpPr>
+      <p:sp>
+        <p:nvSpPr>
+          <p:cNvPr id="2" name="Date Placeholder 1"/>
+          <p:cNvSpPr>
+            <a:spLocks noGrp="1"/>
+          </p:cNvSpPr>
+          <p:nvPr>
+            <p:ph type="dt" sz="half" idx="10"/>
+          </p:nvPr>
+        </p:nvSpPr>
+        <p:spPr/>
+        <p:txBody>
+          <a:bodyPr/>
+          <a:lstStyle/>
+          <a:p>
+            <a:fld id="{C764DE79-268F-4C1A-8933-263129D2AF90}" type="datetimeFigureOut">
+              <a:rPr lang="en-US" smtClean="0"/>
+              <a:t>3/10/2026</a:t>
+            </a:fld>
+            <a:endParaRPr lang="en-US" dirty="0"/>
+          </a:p>
+        </p:txBody>
+      </p:sp>
+      <p:sp>
+        <p:nvSpPr>
+          <p:cNvPr id="3" name="Footer Placeholder 2"/>
+          <p:cNvSpPr>
+            <a:spLocks noGrp="1"/>
+          </p:cNvSpPr>
+          <p:nvPr>
+            <p:ph type="ftr" sz="quarter" idx="11"/>
+          </p:nvPr>
+        </p:nvSpPr>
+        <p:spPr/>
+        <p:txBody>
+          <a:bodyPr/>
+          <a:lstStyle/>
+          <a:p>
+            <a:endParaRPr lang="en-US" dirty="0"/>
+          </a:p>
+        </p:txBody>
+      </p:sp>
+      <p:sp>
+        <p:nvSpPr>
+          <p:cNvPr id="4" name="Slide Number Placeholder 3"/>
+          <p:cNvSpPr>
+            <a:spLocks noGrp="1"/>
+          </p:cNvSpPr>
+          <p:nvPr>
+            <p:ph type="sldNum" sz="quarter" idx="12"/>
+          </p:nvPr>
+        </p:nvSpPr>
+        <p:spPr/>
+        <p:txBody>
+          <a:bodyPr/>
+          <a:lstStyle/>
+          <a:p>
+            <a:fld id="{48F63A3B-78C7-47BE-AE5E-E10140E04643}" type="slidenum">
+              <a:rPr lang="en-US" smtClean="0"/>
+              <a:t>‹#›</a:t>
+            </a:fld>
+            <a:endParaRPr lang="en-US" dirty="0"/>
+          </a:p>
+        </p:txBody>
+      </p:sp>
+    </p:spTree>
+    <p:extLst>
+      <p:ext uri="{BB962C8B-B14F-4D97-AF65-F5344CB8AC3E}">
+        <p14:creationId xmlns:p14="http://schemas.microsoft.com/office/powerpoint/2010/main" val="1963158576"/>
+      </p:ext>
+    </p:extLst>
+  </p:cSld>
+  <p:clrMapOvr>
+    <a:masterClrMapping/>
+  </p:clrMapOvr>
+  <p:hf sldNum="0" hdr="0" ftr="0" dt="0"/>
+</p:sldLayout>
+</file>
+
+<file path=ppt/slideLayouts/slideLayout8.xml><?xml version="1.0" encoding="utf-8"?>
+<p:sldLayout xmlns:a="http://schemas.openxmlformats.org/drawingml/2006/main" xmlns:r="http://schemas.openxmlformats.org/officeDocument/2006/relationships" xmlns:p="http://schemas.openxmlformats.org/presentationml/2006/main" type="objTx" preserve="1">
+  <p:cSld name="Content with Caption">
+    <p:spTree>
+      <p:nvGrpSpPr>
+        <p:cNvPr id="1" name=""/>
+        <p:cNvGrpSpPr/>
+        <p:nvPr/>
+      </p:nvGrpSpPr>
+      <p:grpSpPr>
+        <a:xfrm>
+          <a:off x="0" y="0"/>
+          <a:ext cx="0" cy="0"/>
+          <a:chOff x="0" y="0"/>
+          <a:chExt cx="0" cy="0"/>
+        </a:xfrm>
+      </p:grpSpPr>
+      <p:sp>
+        <p:nvSpPr>
+          <p:cNvPr id="2" name="Title 1"/>
+          <p:cNvSpPr>
+            <a:spLocks noGrp="1"/>
+          </p:cNvSpPr>
+          <p:nvPr>
+            <p:ph type="title"/>
+          </p:nvPr>
+        </p:nvSpPr>
+        <p:spPr>
+          <a:xfrm>
+            <a:off x="629841" y="342900"/>
+            <a:ext cx="2949178" cy="1200150"/>
+          </a:xfrm>
+        </p:spPr>
+        <p:txBody>
+          <a:bodyPr anchor="b"/>
+          <a:lstStyle>
+            <a:lvl1pPr>
+              <a:defRPr sz="2400"/>
+            </a:lvl1pPr>
+          </a:lstStyle>
+          <a:p>
+            <a:r>
+              <a:rPr lang="en-US"/>
+              <a:t>Click to edit Master title style</a:t>
+            </a:r>
+            <a:endParaRPr lang="en-US" dirty="0"/>
+          </a:p>
+        </p:txBody>
+      </p:sp>
+      <p:sp>
+        <p:nvSpPr>
+          <p:cNvPr id="3" name="Content Placeholder 2"/>
+          <p:cNvSpPr>
+            <a:spLocks noGrp="1"/>
+          </p:cNvSpPr>
+          <p:nvPr>
+            <p:ph idx="1"/>
+          </p:nvPr>
+        </p:nvSpPr>
+        <p:spPr>
+          <a:xfrm>
+            <a:off x="3887391" y="740569"/>
+            <a:ext cx="4629150" cy="3655219"/>
+          </a:xfrm>
+        </p:spPr>
+        <p:txBody>
+          <a:bodyPr/>
+          <a:lstStyle>
+            <a:lvl1pPr>
+              <a:defRPr sz="2400"/>
+            </a:lvl1pPr>
+            <a:lvl2pPr>
+              <a:defRPr sz="2100"/>
+            </a:lvl2pPr>
+            <a:lvl3pPr>
+              <a:defRPr sz="1800"/>
+            </a:lvl3pPr>
+            <a:lvl4pPr>
+              <a:defRPr sz="1500"/>
+            </a:lvl4pPr>
+            <a:lvl5pPr>
+              <a:defRPr sz="1500"/>
+            </a:lvl5pPr>
+            <a:lvl6pPr>
+              <a:defRPr sz="1500"/>
+            </a:lvl6pPr>
+            <a:lvl7pPr>
+              <a:defRPr sz="1500"/>
+            </a:lvl7pPr>
+            <a:lvl8pPr>
+              <a:defRPr sz="1500"/>
+            </a:lvl8pPr>
+            <a:lvl9pPr>
+              <a:defRPr sz="1500"/>
+            </a:lvl9pPr>
+          </a:lstStyle>
+          <a:p>
+            <a:pPr lvl="0"/>
+            <a:r>
+              <a:rPr lang="en-US"/>
+              <a:t>Click to edit Master text styles</a:t>
+            </a:r>
+          </a:p>
+          <a:p>
+            <a:pPr lvl="1"/>
+            <a:r>
+              <a:rPr lang="en-US"/>
+              <a:t>Second level</a:t>
+            </a:r>
+          </a:p>
+          <a:p>
+            <a:pPr lvl="2"/>
+            <a:r>
+              <a:rPr lang="en-US"/>
+              <a:t>Third level</a:t>
+            </a:r>
+          </a:p>
+          <a:p>
+            <a:pPr lvl="3"/>
+            <a:r>
+              <a:rPr lang="en-US"/>
+              <a:t>Fourth level</a:t>
+            </a:r>
+          </a:p>
+          <a:p>
+            <a:pPr lvl="4"/>
+            <a:r>
+              <a:rPr lang="en-US"/>
+              <a:t>Fifth level</a:t>
+            </a:r>
+            <a:endParaRPr lang="en-US" dirty="0"/>
+          </a:p>
+        </p:txBody>
+      </p:sp>
+      <p:sp>
+        <p:nvSpPr>
+          <p:cNvPr id="4" name="Text Placeholder 3"/>
+          <p:cNvSpPr>
+            <a:spLocks noGrp="1"/>
+          </p:cNvSpPr>
+          <p:nvPr>
+            <p:ph type="body" sz="half" idx="2"/>
+          </p:nvPr>
+        </p:nvSpPr>
+        <p:spPr>
+          <a:xfrm>
+            <a:off x="629841" y="1543050"/>
+            <a:ext cx="2949178" cy="2858691"/>
+          </a:xfrm>
+        </p:spPr>
+        <p:txBody>
+          <a:bodyPr/>
+          <a:lstStyle>
+            <a:lvl1pPr marL="0" indent="0">
+              <a:buNone/>
+              <a:defRPr sz="1200"/>
+            </a:lvl1pPr>
+            <a:lvl2pPr marL="342900" indent="0">
+              <a:buNone/>
+              <a:defRPr sz="1050"/>
+            </a:lvl2pPr>
+            <a:lvl3pPr marL="685800" indent="0">
+              <a:buNone/>
+              <a:defRPr sz="900"/>
+            </a:lvl3pPr>
+            <a:lvl4pPr marL="1028700" indent="0">
+              <a:buNone/>
+              <a:defRPr sz="750"/>
+            </a:lvl4pPr>
+            <a:lvl5pPr marL="1371600" indent="0">
+              <a:buNone/>
+              <a:defRPr sz="750"/>
+            </a:lvl5pPr>
+            <a:lvl6pPr marL="1714500" indent="0">
+              <a:buNone/>
+              <a:defRPr sz="750"/>
+            </a:lvl6pPr>
+            <a:lvl7pPr marL="2057400" indent="0">
+              <a:buNone/>
+              <a:defRPr sz="750"/>
+            </a:lvl7pPr>
+            <a:lvl8pPr marL="2400300" indent="0">
+              <a:buNone/>
+              <a:defRPr sz="750"/>
+            </a:lvl8pPr>
+            <a:lvl9pPr marL="2743200" indent="0">
+              <a:buNone/>
+              <a:defRPr sz="750"/>
+            </a:lvl9pPr>
+          </a:lstStyle>
+          <a:p>
+            <a:pPr lvl="0"/>
+            <a:r>
+              <a:rPr lang="en-US"/>
+              <a:t>Click to edit Master text styles</a:t>
+            </a:r>
+          </a:p>
+        </p:txBody>
+      </p:sp>
+      <p:sp>
+        <p:nvSpPr>
+          <p:cNvPr id="5" name="Date Placeholder 4"/>
+          <p:cNvSpPr>
+            <a:spLocks noGrp="1"/>
+          </p:cNvSpPr>
+          <p:nvPr>
+            <p:ph type="dt" sz="half" idx="10"/>
+          </p:nvPr>
+        </p:nvSpPr>
+        <p:spPr/>
+        <p:txBody>
+          <a:bodyPr/>
+          <a:lstStyle/>
+          <a:p>
+            <a:fld id="{C764DE79-268F-4C1A-8933-263129D2AF90}" type="datetimeFigureOut">
+              <a:rPr lang="en-US" smtClean="0"/>
+              <a:t>3/10/2026</a:t>
+            </a:fld>
+            <a:endParaRPr lang="en-US" dirty="0"/>
+          </a:p>
+        </p:txBody>
+      </p:sp>
+      <p:sp>
+        <p:nvSpPr>
+          <p:cNvPr id="6" name="Footer Placeholder 5"/>
+          <p:cNvSpPr>
+            <a:spLocks noGrp="1"/>
+          </p:cNvSpPr>
+          <p:nvPr>
+            <p:ph type="ftr" sz="quarter" idx="11"/>
+          </p:nvPr>
+        </p:nvSpPr>
+        <p:spPr/>
+        <p:txBody>
+          <a:bodyPr/>
+          <a:lstStyle/>
+          <a:p>
+            <a:endParaRPr lang="en-US" dirty="0"/>
+          </a:p>
+        </p:txBody>
+      </p:sp>
+      <p:sp>
+        <p:nvSpPr>
+          <p:cNvPr id="7" name="Slide Number Placeholder 6"/>
+          <p:cNvSpPr>
+            <a:spLocks noGrp="1"/>
+          </p:cNvSpPr>
+          <p:nvPr>
+            <p:ph type="sldNum" sz="quarter" idx="12"/>
+          </p:nvPr>
+        </p:nvSpPr>
+        <p:spPr/>
+        <p:txBody>
+          <a:bodyPr/>
+          <a:lstStyle/>
+          <a:p>
+            <a:fld id="{48F63A3B-78C7-47BE-AE5E-E10140E04643}" type="slidenum">
+              <a:rPr lang="en-US" smtClean="0"/>
+              <a:t>‹#›</a:t>
+            </a:fld>
+            <a:endParaRPr lang="en-US" dirty="0"/>
+          </a:p>
+        </p:txBody>
+      </p:sp>
+    </p:spTree>
+    <p:extLst>
+      <p:ext uri="{BB962C8B-B14F-4D97-AF65-F5344CB8AC3E}">
+        <p14:creationId xmlns:p14="http://schemas.microsoft.com/office/powerpoint/2010/main" val="3173874336"/>
+      </p:ext>
+    </p:extLst>
+  </p:cSld>
+  <p:clrMapOvr>
+    <a:masterClrMapping/>
+  </p:clrMapOvr>
+  <p:hf sldNum="0" hdr="0" ftr="0" dt="0"/>
+</p:sldLayout>
+</file>
+
+<file path=ppt/slideLayouts/slideLayout9.xml><?xml version="1.0" encoding="utf-8"?>
+<p:sldLayout xmlns:a="http://schemas.openxmlformats.org/drawingml/2006/main" xmlns:r="http://schemas.openxmlformats.org/officeDocument/2006/relationships" xmlns:p="http://schemas.openxmlformats.org/presentationml/2006/main" type="picTx" preserve="1">
+  <p:cSld name="Picture with Caption">
+    <p:spTree>
+      <p:nvGrpSpPr>
+        <p:cNvPr id="1" name=""/>
+        <p:cNvGrpSpPr/>
+        <p:nvPr/>
+      </p:nvGrpSpPr>
+      <p:grpSpPr>
+        <a:xfrm>
+          <a:off x="0" y="0"/>
+          <a:ext cx="0" cy="0"/>
+          <a:chOff x="0" y="0"/>
+          <a:chExt cx="0" cy="0"/>
+        </a:xfrm>
+      </p:grpSpPr>
+      <p:sp>
+        <p:nvSpPr>
+          <p:cNvPr id="2" name="Title 1"/>
+          <p:cNvSpPr>
+            <a:spLocks noGrp="1"/>
+          </p:cNvSpPr>
+          <p:nvPr>
+            <p:ph type="title"/>
+          </p:nvPr>
+        </p:nvSpPr>
+        <p:spPr>
+          <a:xfrm>
+            <a:off x="629841" y="342900"/>
+            <a:ext cx="2949178" cy="1200150"/>
+          </a:xfrm>
+        </p:spPr>
+        <p:txBody>
+          <a:bodyPr anchor="b"/>
+          <a:lstStyle>
+            <a:lvl1pPr>
+              <a:defRPr sz="2400"/>
+            </a:lvl1pPr>
+          </a:lstStyle>
+          <a:p>
+            <a:r>
+              <a:rPr lang="en-US"/>
+              <a:t>Click to edit Master title style</a:t>
+            </a:r>
+            <a:endParaRPr lang="en-US" dirty="0"/>
+          </a:p>
+        </p:txBody>
+      </p:sp>
+      <p:sp>
+        <p:nvSpPr>
+          <p:cNvPr id="3" name="Picture Placeholder 2"/>
+          <p:cNvSpPr>
+            <a:spLocks noGrp="1" noChangeAspect="1"/>
+          </p:cNvSpPr>
+          <p:nvPr>
+            <p:ph type="pic" idx="1"/>
+          </p:nvPr>
+        </p:nvSpPr>
+        <p:spPr>
+          <a:xfrm>
+            <a:off x="3887391" y="740569"/>
+            <a:ext cx="4629150" cy="3655219"/>
+          </a:xfrm>
+        </p:spPr>
+        <p:txBody>
+          <a:bodyPr anchor="t"/>
+          <a:lstStyle>
+            <a:lvl1pPr marL="0" indent="0">
+              <a:buNone/>
+              <a:defRPr sz="2400"/>
+            </a:lvl1pPr>
+            <a:lvl2pPr marL="342900" indent="0">
+              <a:buNone/>
+              <a:defRPr sz="2100"/>
+            </a:lvl2pPr>
+            <a:lvl3pPr marL="685800" indent="0">
+              <a:buNone/>
+              <a:defRPr sz="1800"/>
+            </a:lvl3pPr>
+            <a:lvl4pPr marL="1028700" indent="0">
+              <a:buNone/>
+              <a:defRPr sz="1500"/>
+            </a:lvl4pPr>
+            <a:lvl5pPr marL="1371600" indent="0">
+              <a:buNone/>
+              <a:defRPr sz="1500"/>
+            </a:lvl5pPr>
+            <a:lvl6pPr marL="1714500" indent="0">
+              <a:buNone/>
+              <a:defRPr sz="1500"/>
+            </a:lvl6pPr>
+            <a:lvl7pPr marL="2057400" indent="0">
+              <a:buNone/>
+              <a:defRPr sz="1500"/>
+            </a:lvl7pPr>
+            <a:lvl8pPr marL="2400300" indent="0">
+              <a:buNone/>
+              <a:defRPr sz="1500"/>
+            </a:lvl8pPr>
+            <a:lvl9pPr marL="2743200" indent="0">
+              <a:buNone/>
+              <a:defRPr sz="1500"/>
+            </a:lvl9pPr>
+          </a:lstStyle>
+          <a:p>
+            <a:r>
+              <a:rPr lang="en-US"/>
+              <a:t>Click icon to add picture</a:t>
+            </a:r>
+            <a:endParaRPr lang="en-US" dirty="0"/>
+          </a:p>
+        </p:txBody>
+      </p:sp>
+      <p:sp>
+        <p:nvSpPr>
+          <p:cNvPr id="4" name="Text Placeholder 3"/>
+          <p:cNvSpPr>
+            <a:spLocks noGrp="1"/>
+          </p:cNvSpPr>
+          <p:nvPr>
+            <p:ph type="body" sz="half" idx="2"/>
+          </p:nvPr>
+        </p:nvSpPr>
+        <p:spPr>
+          <a:xfrm>
+            <a:off x="629841" y="1543050"/>
+            <a:ext cx="2949178" cy="2858691"/>
+          </a:xfrm>
+        </p:spPr>
+        <p:txBody>
+          <a:bodyPr/>
+          <a:lstStyle>
+            <a:lvl1pPr marL="0" indent="0">
+              <a:buNone/>
+              <a:defRPr sz="1200"/>
+            </a:lvl1pPr>
+            <a:lvl2pPr marL="342900" indent="0">
+              <a:buNone/>
+              <a:defRPr sz="1050"/>
+            </a:lvl2pPr>
+            <a:lvl3pPr marL="685800" indent="0">
+              <a:buNone/>
+              <a:defRPr sz="900"/>
+            </a:lvl3pPr>
+            <a:lvl4pPr marL="1028700" indent="0">
+              <a:buNone/>
+              <a:defRPr sz="750"/>
+            </a:lvl4pPr>
+            <a:lvl5pPr marL="1371600" indent="0">
+              <a:buNone/>
+              <a:defRPr sz="750"/>
+            </a:lvl5pPr>
+            <a:lvl6pPr marL="1714500" indent="0">
+              <a:buNone/>
+              <a:defRPr sz="750"/>
+            </a:lvl6pPr>
+            <a:lvl7pPr marL="2057400" indent="0">
+              <a:buNone/>
+              <a:defRPr sz="750"/>
+            </a:lvl7pPr>
+            <a:lvl8pPr marL="2400300" indent="0">
+              <a:buNone/>
+              <a:defRPr sz="750"/>
+            </a:lvl8pPr>
+            <a:lvl9pPr marL="2743200" indent="0">
+              <a:buNone/>
+              <a:defRPr sz="750"/>
+            </a:lvl9pPr>
+          </a:lstStyle>
+          <a:p>
+            <a:pPr lvl="0"/>
+            <a:r>
+              <a:rPr lang="en-US"/>
+              <a:t>Click to edit Master text styles</a:t>
+            </a:r>
+          </a:p>
+        </p:txBody>
+      </p:sp>
+      <p:sp>
+        <p:nvSpPr>
+          <p:cNvPr id="5" name="Date Placeholder 4"/>
+          <p:cNvSpPr>
+            <a:spLocks noGrp="1"/>
+          </p:cNvSpPr>
+          <p:nvPr>
+            <p:ph type="dt" sz="half" idx="10"/>
+          </p:nvPr>
+        </p:nvSpPr>
+        <p:spPr/>
+        <p:txBody>
+          <a:bodyPr/>
+          <a:lstStyle/>
+          <a:p>
+            <a:fld id="{C764DE79-268F-4C1A-8933-263129D2AF90}" type="datetimeFigureOut">
+              <a:rPr lang="en-US" smtClean="0"/>
+              <a:t>3/10/2026</a:t>
+            </a:fld>
+            <a:endParaRPr lang="en-US" dirty="0"/>
+          </a:p>
+        </p:txBody>
+      </p:sp>
+      <p:sp>
+        <p:nvSpPr>
+          <p:cNvPr id="6" name="Footer Placeholder 5"/>
+          <p:cNvSpPr>
+            <a:spLocks noGrp="1"/>
+          </p:cNvSpPr>
+          <p:nvPr>
+            <p:ph type="ftr" sz="quarter" idx="11"/>
+          </p:nvPr>
+        </p:nvSpPr>
+        <p:spPr/>
+        <p:txBody>
+          <a:bodyPr/>
+          <a:lstStyle/>
+          <a:p>
+            <a:endParaRPr lang="en-US" dirty="0"/>
+          </a:p>
+        </p:txBody>
+      </p:sp>
+      <p:sp>
+        <p:nvSpPr>
+          <p:cNvPr id="7" name="Slide Number Placeholder 6"/>
+          <p:cNvSpPr>
+            <a:spLocks noGrp="1"/>
+          </p:cNvSpPr>
+          <p:nvPr>
+            <p:ph type="sldNum" sz="quarter" idx="12"/>
+          </p:nvPr>
+        </p:nvSpPr>
+        <p:spPr/>
+        <p:txBody>
+          <a:bodyPr/>
+          <a:lstStyle/>
+          <a:p>
+            <a:fld id="{48F63A3B-78C7-47BE-AE5E-E10140E04643}" type="slidenum">
+              <a:rPr lang="en-US" smtClean="0"/>
+              <a:t>‹#›</a:t>
+            </a:fld>
+            <a:endParaRPr lang="en-US" dirty="0"/>
+          </a:p>
+        </p:txBody>
+      </p:sp>
+    </p:spTree>
+    <p:extLst>
+      <p:ext uri="{BB962C8B-B14F-4D97-AF65-F5344CB8AC3E}">
+        <p14:creationId xmlns:p14="http://schemas.microsoft.com/office/powerpoint/2010/main" val="2335944286"/>
+      </p:ext>
+    </p:extLst>
+  </p:cSld>
+  <p:clrMapOvr>
+    <a:masterClrMapping/>
+  </p:clrMapOvr>
+  <p:hf sldNum="0" hdr="0" ftr="0" dt="0"/>
 </p:sldLayout>
 </file>
 
@@ -4719,21 +6979,254 @@
           <a:chExt cx="0" cy="0"/>
         </a:xfrm>
       </p:grpSpPr>
+      <p:sp>
+        <p:nvSpPr>
+          <p:cNvPr id="2" name="Title Placeholder 1"/>
+          <p:cNvSpPr>
+            <a:spLocks noGrp="1"/>
+          </p:cNvSpPr>
+          <p:nvPr>
+            <p:ph type="title"/>
+          </p:nvPr>
+        </p:nvSpPr>
+        <p:spPr>
+          <a:xfrm>
+            <a:off x="628650" y="273844"/>
+            <a:ext cx="7886700" cy="994172"/>
+          </a:xfrm>
+          <a:prstGeom prst="rect">
+            <a:avLst/>
+          </a:prstGeom>
+        </p:spPr>
+        <p:txBody>
+          <a:bodyPr vert="horz" lIns="91440" tIns="45720" rIns="91440" bIns="45720" rtlCol="0" anchor="ctr">
+            <a:normAutofit/>
+          </a:bodyPr>
+          <a:lstStyle/>
+          <a:p>
+            <a:r>
+              <a:rPr lang="en-US"/>
+              <a:t>Click to edit Master title style</a:t>
+            </a:r>
+            <a:endParaRPr lang="en-US" dirty="0"/>
+          </a:p>
+        </p:txBody>
+      </p:sp>
+      <p:sp>
+        <p:nvSpPr>
+          <p:cNvPr id="3" name="Text Placeholder 2"/>
+          <p:cNvSpPr>
+            <a:spLocks noGrp="1"/>
+          </p:cNvSpPr>
+          <p:nvPr>
+            <p:ph type="body" idx="1"/>
+          </p:nvPr>
+        </p:nvSpPr>
+        <p:spPr>
+          <a:xfrm>
+            <a:off x="628650" y="1369219"/>
+            <a:ext cx="7886700" cy="3263504"/>
+          </a:xfrm>
+          <a:prstGeom prst="rect">
+            <a:avLst/>
+          </a:prstGeom>
+        </p:spPr>
+        <p:txBody>
+          <a:bodyPr vert="horz" lIns="91440" tIns="45720" rIns="91440" bIns="45720" rtlCol="0">
+            <a:normAutofit/>
+          </a:bodyPr>
+          <a:lstStyle/>
+          <a:p>
+            <a:pPr lvl="0"/>
+            <a:r>
+              <a:rPr lang="en-US"/>
+              <a:t>Click to edit Master text styles</a:t>
+            </a:r>
+          </a:p>
+          <a:p>
+            <a:pPr lvl="1"/>
+            <a:r>
+              <a:rPr lang="en-US"/>
+              <a:t>Second level</a:t>
+            </a:r>
+          </a:p>
+          <a:p>
+            <a:pPr lvl="2"/>
+            <a:r>
+              <a:rPr lang="en-US"/>
+              <a:t>Third level</a:t>
+            </a:r>
+          </a:p>
+          <a:p>
+            <a:pPr lvl="3"/>
+            <a:r>
+              <a:rPr lang="en-US"/>
+              <a:t>Fourth level</a:t>
+            </a:r>
+          </a:p>
+          <a:p>
+            <a:pPr lvl="4"/>
+            <a:r>
+              <a:rPr lang="en-US"/>
+              <a:t>Fifth level</a:t>
+            </a:r>
+            <a:endParaRPr lang="en-US" dirty="0"/>
+          </a:p>
+        </p:txBody>
+      </p:sp>
+      <p:sp>
+        <p:nvSpPr>
+          <p:cNvPr id="4" name="Date Placeholder 3"/>
+          <p:cNvSpPr>
+            <a:spLocks noGrp="1"/>
+          </p:cNvSpPr>
+          <p:nvPr>
+            <p:ph type="dt" sz="half" idx="2"/>
+          </p:nvPr>
+        </p:nvSpPr>
+        <p:spPr>
+          <a:xfrm>
+            <a:off x="628650" y="4767263"/>
+            <a:ext cx="2057400" cy="273844"/>
+          </a:xfrm>
+          <a:prstGeom prst="rect">
+            <a:avLst/>
+          </a:prstGeom>
+        </p:spPr>
+        <p:txBody>
+          <a:bodyPr vert="horz" lIns="91440" tIns="45720" rIns="91440" bIns="45720" rtlCol="0" anchor="ctr"/>
+          <a:lstStyle>
+            <a:lvl1pPr algn="l">
+              <a:defRPr sz="900">
+                <a:solidFill>
+                  <a:schemeClr val="tx1">
+                    <a:tint val="75000"/>
+                  </a:schemeClr>
+                </a:solidFill>
+              </a:defRPr>
+            </a:lvl1pPr>
+          </a:lstStyle>
+          <a:p>
+            <a:fld id="{C764DE79-268F-4C1A-8933-263129D2AF90}" type="datetimeFigureOut">
+              <a:rPr lang="en-US" smtClean="0"/>
+              <a:t>3/10/2026</a:t>
+            </a:fld>
+            <a:endParaRPr lang="en-US" dirty="0"/>
+          </a:p>
+        </p:txBody>
+      </p:sp>
+      <p:sp>
+        <p:nvSpPr>
+          <p:cNvPr id="5" name="Footer Placeholder 4"/>
+          <p:cNvSpPr>
+            <a:spLocks noGrp="1"/>
+          </p:cNvSpPr>
+          <p:nvPr>
+            <p:ph type="ftr" sz="quarter" idx="3"/>
+          </p:nvPr>
+        </p:nvSpPr>
+        <p:spPr>
+          <a:xfrm>
+            <a:off x="3028950" y="4767263"/>
+            <a:ext cx="3086100" cy="273844"/>
+          </a:xfrm>
+          <a:prstGeom prst="rect">
+            <a:avLst/>
+          </a:prstGeom>
+        </p:spPr>
+        <p:txBody>
+          <a:bodyPr vert="horz" lIns="91440" tIns="45720" rIns="91440" bIns="45720" rtlCol="0" anchor="ctr"/>
+          <a:lstStyle>
+            <a:lvl1pPr algn="ctr">
+              <a:defRPr sz="900">
+                <a:solidFill>
+                  <a:schemeClr val="tx1">
+                    <a:tint val="75000"/>
+                  </a:schemeClr>
+                </a:solidFill>
+              </a:defRPr>
+            </a:lvl1pPr>
+          </a:lstStyle>
+          <a:p>
+            <a:endParaRPr lang="en-US" dirty="0"/>
+          </a:p>
+        </p:txBody>
+      </p:sp>
+      <p:sp>
+        <p:nvSpPr>
+          <p:cNvPr id="6" name="Slide Number Placeholder 5"/>
+          <p:cNvSpPr>
+            <a:spLocks noGrp="1"/>
+          </p:cNvSpPr>
+          <p:nvPr>
+            <p:ph type="sldNum" sz="quarter" idx="4"/>
+          </p:nvPr>
+        </p:nvSpPr>
+        <p:spPr>
+          <a:xfrm>
+            <a:off x="6457950" y="4767263"/>
+            <a:ext cx="2057400" cy="273844"/>
+          </a:xfrm>
+          <a:prstGeom prst="rect">
+            <a:avLst/>
+          </a:prstGeom>
+        </p:spPr>
+        <p:txBody>
+          <a:bodyPr vert="horz" lIns="91440" tIns="45720" rIns="91440" bIns="45720" rtlCol="0" anchor="ctr"/>
+          <a:lstStyle>
+            <a:lvl1pPr algn="r">
+              <a:defRPr sz="900">
+                <a:solidFill>
+                  <a:schemeClr val="tx1">
+                    <a:tint val="75000"/>
+                  </a:schemeClr>
+                </a:solidFill>
+              </a:defRPr>
+            </a:lvl1pPr>
+          </a:lstStyle>
+          <a:p>
+            <a:fld id="{48F63A3B-78C7-47BE-AE5E-E10140E04643}" type="slidenum">
+              <a:rPr lang="en-US" smtClean="0"/>
+              <a:t>‹#›</a:t>
+            </a:fld>
+            <a:endParaRPr lang="en-US" dirty="0"/>
+          </a:p>
+        </p:txBody>
+      </p:sp>
     </p:spTree>
+    <p:extLst>
+      <p:ext uri="{BB962C8B-B14F-4D97-AF65-F5344CB8AC3E}">
+        <p14:creationId xmlns:p14="http://schemas.microsoft.com/office/powerpoint/2010/main" val="1991503966"/>
+      </p:ext>
+    </p:extLst>
   </p:cSld>
-  <p:clrMap bg1="lt1" tx1="dk1" bg2="lt2" tx2="dk2" accent1="accent1" accent2="accent2" accent3="accent3" accent4="accent4" accent5="accent5" accent6="accent6" hlink="hlink" folHlink="folHlink"/>
+  <p:clrMap bg1="dk1" tx1="lt1" bg2="dk2" tx2="lt2" accent1="accent1" accent2="accent2" accent3="accent3" accent4="accent4" accent5="accent5" accent6="accent6" hlink="hlink" folHlink="folHlink"/>
   <p:sldLayoutIdLst>
-    <p:sldLayoutId id="2147483649" r:id="rId1"/>
+    <p:sldLayoutId id="2147483664" r:id="rId1"/>
+    <p:sldLayoutId id="2147483665" r:id="rId2"/>
+    <p:sldLayoutId id="2147483666" r:id="rId3"/>
+    <p:sldLayoutId id="2147483667" r:id="rId4"/>
+    <p:sldLayoutId id="2147483668" r:id="rId5"/>
+    <p:sldLayoutId id="2147483669" r:id="rId6"/>
+    <p:sldLayoutId id="2147483670" r:id="rId7"/>
+    <p:sldLayoutId id="2147483671" r:id="rId8"/>
+    <p:sldLayoutId id="2147483672" r:id="rId9"/>
+    <p:sldLayoutId id="2147483673" r:id="rId10"/>
+    <p:sldLayoutId id="2147483674" r:id="rId11"/>
+    <p:sldLayoutId id="2147483675" r:id="rId12"/>
   </p:sldLayoutIdLst>
   <p:hf sldNum="0" hdr="0" ftr="0" dt="0"/>
   <p:txStyles>
     <p:titleStyle>
-      <a:lvl1pPr algn="ctr" defTabSz="914400" rtl="0" eaLnBrk="1" latinLnBrk="0" hangingPunct="1">
+      <a:lvl1pPr algn="l" defTabSz="685800" rtl="0" eaLnBrk="1" latinLnBrk="0" hangingPunct="1">
+        <a:lnSpc>
+          <a:spcPct val="90000"/>
+        </a:lnSpc>
         <a:spcBef>
           <a:spcPct val="0"/>
         </a:spcBef>
         <a:buNone/>
-        <a:defRPr sz="4400" kern="1200">
+        <a:defRPr sz="3300" kern="1200">
           <a:solidFill>
             <a:schemeClr val="tx1"/>
           </a:solidFill>
@@ -4744,13 +7237,16 @@
       </a:lvl1pPr>
     </p:titleStyle>
     <p:bodyStyle>
-      <a:lvl1pPr marL="342900" indent="-342900" algn="l" defTabSz="914400" rtl="0" eaLnBrk="1" latinLnBrk="0" hangingPunct="1">
+      <a:lvl1pPr marL="171450" indent="-171450" algn="l" defTabSz="685800" rtl="0" eaLnBrk="1" latinLnBrk="0" hangingPunct="1">
+        <a:lnSpc>
+          <a:spcPct val="90000"/>
+        </a:lnSpc>
         <a:spcBef>
-          <a:spcPct val="20000"/>
+          <a:spcPts val="750"/>
         </a:spcBef>
-        <a:buFont typeface="Arial" pitchFamily="34" charset="0"/>
+        <a:buFont typeface="Arial" panose="020B0604020202020204" pitchFamily="34" charset="0"/>
         <a:buChar char="•"/>
-        <a:defRPr sz="3200" kern="1200">
+        <a:defRPr sz="2100" kern="1200">
           <a:solidFill>
             <a:schemeClr val="tx1"/>
           </a:solidFill>
@@ -4759,13 +7255,16 @@
           <a:cs typeface="+mn-cs"/>
         </a:defRPr>
       </a:lvl1pPr>
-      <a:lvl2pPr marL="742950" indent="-285750" algn="l" defTabSz="914400" rtl="0" eaLnBrk="1" latinLnBrk="0" hangingPunct="1">
+      <a:lvl2pPr marL="514350" indent="-171450" algn="l" defTabSz="685800" rtl="0" eaLnBrk="1" latinLnBrk="0" hangingPunct="1">
+        <a:lnSpc>
+          <a:spcPct val="90000"/>
+        </a:lnSpc>
         <a:spcBef>
-          <a:spcPct val="20000"/>
+          <a:spcPts val="375"/>
         </a:spcBef>
-        <a:buFont typeface="Arial" pitchFamily="34" charset="0"/>
-        <a:buChar char="–"/>
-        <a:defRPr sz="2800" kern="1200">
+        <a:buFont typeface="Arial" panose="020B0604020202020204" pitchFamily="34" charset="0"/>
+        <a:buChar char="•"/>
+        <a:defRPr sz="1800" kern="1200">
           <a:solidFill>
             <a:schemeClr val="tx1"/>
           </a:solidFill>
@@ -4774,13 +7273,16 @@
           <a:cs typeface="+mn-cs"/>
         </a:defRPr>
       </a:lvl2pPr>
-      <a:lvl3pPr marL="1143000" indent="-228600" algn="l" defTabSz="914400" rtl="0" eaLnBrk="1" latinLnBrk="0" hangingPunct="1">
+      <a:lvl3pPr marL="857250" indent="-171450" algn="l" defTabSz="685800" rtl="0" eaLnBrk="1" latinLnBrk="0" hangingPunct="1">
+        <a:lnSpc>
+          <a:spcPct val="90000"/>
+        </a:lnSpc>
         <a:spcBef>
-          <a:spcPct val="20000"/>
+          <a:spcPts val="375"/>
         </a:spcBef>
-        <a:buFont typeface="Arial" pitchFamily="34" charset="0"/>
+        <a:buFont typeface="Arial" panose="020B0604020202020204" pitchFamily="34" charset="0"/>
         <a:buChar char="•"/>
-        <a:defRPr sz="2400" kern="1200">
+        <a:defRPr sz="1500" kern="1200">
           <a:solidFill>
             <a:schemeClr val="tx1"/>
           </a:solidFill>
@@ -4789,13 +7291,16 @@
           <a:cs typeface="+mn-cs"/>
         </a:defRPr>
       </a:lvl3pPr>
-      <a:lvl4pPr marL="1600200" indent="-228600" algn="l" defTabSz="914400" rtl="0" eaLnBrk="1" latinLnBrk="0" hangingPunct="1">
+      <a:lvl4pPr marL="1200150" indent="-171450" algn="l" defTabSz="685800" rtl="0" eaLnBrk="1" latinLnBrk="0" hangingPunct="1">
+        <a:lnSpc>
+          <a:spcPct val="90000"/>
+        </a:lnSpc>
         <a:spcBef>
-          <a:spcPct val="20000"/>
+          <a:spcPts val="375"/>
         </a:spcBef>
-        <a:buFont typeface="Arial" pitchFamily="34" charset="0"/>
-        <a:buChar char="–"/>
-        <a:defRPr sz="2000" kern="1200">
+        <a:buFont typeface="Arial" panose="020B0604020202020204" pitchFamily="34" charset="0"/>
+        <a:buChar char="•"/>
+        <a:defRPr sz="1350" kern="1200">
           <a:solidFill>
             <a:schemeClr val="tx1"/>
           </a:solidFill>
@@ -4804,13 +7309,16 @@
           <a:cs typeface="+mn-cs"/>
         </a:defRPr>
       </a:lvl4pPr>
-      <a:lvl5pPr marL="2057400" indent="-228600" algn="l" defTabSz="914400" rtl="0" eaLnBrk="1" latinLnBrk="0" hangingPunct="1">
+      <a:lvl5pPr marL="1543050" indent="-171450" algn="l" defTabSz="685800" rtl="0" eaLnBrk="1" latinLnBrk="0" hangingPunct="1">
+        <a:lnSpc>
+          <a:spcPct val="90000"/>
+        </a:lnSpc>
         <a:spcBef>
-          <a:spcPct val="20000"/>
+          <a:spcPts val="375"/>
         </a:spcBef>
-        <a:buFont typeface="Arial" pitchFamily="34" charset="0"/>
-        <a:buChar char="»"/>
-        <a:defRPr sz="2000" kern="1200">
+        <a:buFont typeface="Arial" panose="020B0604020202020204" pitchFamily="34" charset="0"/>
+        <a:buChar char="•"/>
+        <a:defRPr sz="1350" kern="1200">
           <a:solidFill>
             <a:schemeClr val="tx1"/>
           </a:solidFill>
@@ -4819,13 +7327,16 @@
           <a:cs typeface="+mn-cs"/>
         </a:defRPr>
       </a:lvl5pPr>
-      <a:lvl6pPr marL="2514600" indent="-228600" algn="l" defTabSz="914400" rtl="0" eaLnBrk="1" latinLnBrk="0" hangingPunct="1">
+      <a:lvl6pPr marL="1885950" indent="-171450" algn="l" defTabSz="685800" rtl="0" eaLnBrk="1" latinLnBrk="0" hangingPunct="1">
+        <a:lnSpc>
+          <a:spcPct val="90000"/>
+        </a:lnSpc>
         <a:spcBef>
-          <a:spcPct val="20000"/>
+          <a:spcPts val="375"/>
         </a:spcBef>
-        <a:buFont typeface="Arial" pitchFamily="34" charset="0"/>
+        <a:buFont typeface="Arial" panose="020B0604020202020204" pitchFamily="34" charset="0"/>
         <a:buChar char="•"/>
-        <a:defRPr sz="2000" kern="1200">
+        <a:defRPr sz="1350" kern="1200">
           <a:solidFill>
             <a:schemeClr val="tx1"/>
           </a:solidFill>
@@ -4834,13 +7345,16 @@
           <a:cs typeface="+mn-cs"/>
         </a:defRPr>
       </a:lvl6pPr>
-      <a:lvl7pPr marL="2971800" indent="-228600" algn="l" defTabSz="914400" rtl="0" eaLnBrk="1" latinLnBrk="0" hangingPunct="1">
+      <a:lvl7pPr marL="2228850" indent="-171450" algn="l" defTabSz="685800" rtl="0" eaLnBrk="1" latinLnBrk="0" hangingPunct="1">
+        <a:lnSpc>
+          <a:spcPct val="90000"/>
+        </a:lnSpc>
         <a:spcBef>
-          <a:spcPct val="20000"/>
+          <a:spcPts val="375"/>
         </a:spcBef>
-        <a:buFont typeface="Arial" pitchFamily="34" charset="0"/>
+        <a:buFont typeface="Arial" panose="020B0604020202020204" pitchFamily="34" charset="0"/>
         <a:buChar char="•"/>
-        <a:defRPr sz="2000" kern="1200">
+        <a:defRPr sz="1350" kern="1200">
           <a:solidFill>
             <a:schemeClr val="tx1"/>
           </a:solidFill>
@@ -4849,13 +7363,16 @@
           <a:cs typeface="+mn-cs"/>
         </a:defRPr>
       </a:lvl7pPr>
-      <a:lvl8pPr marL="3429000" indent="-228600" algn="l" defTabSz="914400" rtl="0" eaLnBrk="1" latinLnBrk="0" hangingPunct="1">
+      <a:lvl8pPr marL="2571750" indent="-171450" algn="l" defTabSz="685800" rtl="0" eaLnBrk="1" latinLnBrk="0" hangingPunct="1">
+        <a:lnSpc>
+          <a:spcPct val="90000"/>
+        </a:lnSpc>
         <a:spcBef>
-          <a:spcPct val="20000"/>
+          <a:spcPts val="375"/>
         </a:spcBef>
-        <a:buFont typeface="Arial" pitchFamily="34" charset="0"/>
+        <a:buFont typeface="Arial" panose="020B0604020202020204" pitchFamily="34" charset="0"/>
         <a:buChar char="•"/>
-        <a:defRPr sz="2000" kern="1200">
+        <a:defRPr sz="1350" kern="1200">
           <a:solidFill>
             <a:schemeClr val="tx1"/>
           </a:solidFill>
@@ -4864,13 +7381,16 @@
           <a:cs typeface="+mn-cs"/>
         </a:defRPr>
       </a:lvl8pPr>
-      <a:lvl9pPr marL="3886200" indent="-228600" algn="l" defTabSz="914400" rtl="0" eaLnBrk="1" latinLnBrk="0" hangingPunct="1">
+      <a:lvl9pPr marL="2914650" indent="-171450" algn="l" defTabSz="685800" rtl="0" eaLnBrk="1" latinLnBrk="0" hangingPunct="1">
+        <a:lnSpc>
+          <a:spcPct val="90000"/>
+        </a:lnSpc>
         <a:spcBef>
-          <a:spcPct val="20000"/>
+          <a:spcPts val="375"/>
         </a:spcBef>
-        <a:buFont typeface="Arial" pitchFamily="34" charset="0"/>
+        <a:buFont typeface="Arial" panose="020B0604020202020204" pitchFamily="34" charset="0"/>
         <a:buChar char="•"/>
-        <a:defRPr sz="2000" kern="1200">
+        <a:defRPr sz="1350" kern="1200">
           <a:solidFill>
             <a:schemeClr val="tx1"/>
           </a:solidFill>
@@ -4884,8 +7404,8 @@
       <a:defPPr>
         <a:defRPr lang="en-US"/>
       </a:defPPr>
-      <a:lvl1pPr marL="0" algn="l" defTabSz="914400" rtl="0" eaLnBrk="1" latinLnBrk="0" hangingPunct="1">
-        <a:defRPr sz="1800" kern="1200">
+      <a:lvl1pPr marL="0" algn="l" defTabSz="685800" rtl="0" eaLnBrk="1" latinLnBrk="0" hangingPunct="1">
+        <a:defRPr sz="1350" kern="1200">
           <a:solidFill>
             <a:schemeClr val="tx1"/>
           </a:solidFill>
@@ -4894,8 +7414,8 @@
           <a:cs typeface="+mn-cs"/>
         </a:defRPr>
       </a:lvl1pPr>
-      <a:lvl2pPr marL="457200" algn="l" defTabSz="914400" rtl="0" eaLnBrk="1" latinLnBrk="0" hangingPunct="1">
-        <a:defRPr sz="1800" kern="1200">
+      <a:lvl2pPr marL="342900" algn="l" defTabSz="685800" rtl="0" eaLnBrk="1" latinLnBrk="0" hangingPunct="1">
+        <a:defRPr sz="1350" kern="1200">
           <a:solidFill>
             <a:schemeClr val="tx1"/>
           </a:solidFill>
@@ -4904,8 +7424,8 @@
           <a:cs typeface="+mn-cs"/>
         </a:defRPr>
       </a:lvl2pPr>
-      <a:lvl3pPr marL="914400" algn="l" defTabSz="914400" rtl="0" eaLnBrk="1" latinLnBrk="0" hangingPunct="1">
-        <a:defRPr sz="1800" kern="1200">
+      <a:lvl3pPr marL="685800" algn="l" defTabSz="685800" rtl="0" eaLnBrk="1" latinLnBrk="0" hangingPunct="1">
+        <a:defRPr sz="1350" kern="1200">
           <a:solidFill>
             <a:schemeClr val="tx1"/>
           </a:solidFill>
@@ -4914,8 +7434,8 @@
           <a:cs typeface="+mn-cs"/>
         </a:defRPr>
       </a:lvl3pPr>
-      <a:lvl4pPr marL="1371600" algn="l" defTabSz="914400" rtl="0" eaLnBrk="1" latinLnBrk="0" hangingPunct="1">
-        <a:defRPr sz="1800" kern="1200">
+      <a:lvl4pPr marL="1028700" algn="l" defTabSz="685800" rtl="0" eaLnBrk="1" latinLnBrk="0" hangingPunct="1">
+        <a:defRPr sz="1350" kern="1200">
           <a:solidFill>
             <a:schemeClr val="tx1"/>
           </a:solidFill>
@@ -4924,8 +7444,8 @@
           <a:cs typeface="+mn-cs"/>
         </a:defRPr>
       </a:lvl4pPr>
-      <a:lvl5pPr marL="1828800" algn="l" defTabSz="914400" rtl="0" eaLnBrk="1" latinLnBrk="0" hangingPunct="1">
-        <a:defRPr sz="1800" kern="1200">
+      <a:lvl5pPr marL="1371600" algn="l" defTabSz="685800" rtl="0" eaLnBrk="1" latinLnBrk="0" hangingPunct="1">
+        <a:defRPr sz="1350" kern="1200">
           <a:solidFill>
             <a:schemeClr val="tx1"/>
           </a:solidFill>
@@ -4934,8 +7454,8 @@
           <a:cs typeface="+mn-cs"/>
         </a:defRPr>
       </a:lvl5pPr>
-      <a:lvl6pPr marL="2286000" algn="l" defTabSz="914400" rtl="0" eaLnBrk="1" latinLnBrk="0" hangingPunct="1">
-        <a:defRPr sz="1800" kern="1200">
+      <a:lvl6pPr marL="1714500" algn="l" defTabSz="685800" rtl="0" eaLnBrk="1" latinLnBrk="0" hangingPunct="1">
+        <a:defRPr sz="1350" kern="1200">
           <a:solidFill>
             <a:schemeClr val="tx1"/>
           </a:solidFill>
@@ -4944,8 +7464,8 @@
           <a:cs typeface="+mn-cs"/>
         </a:defRPr>
       </a:lvl6pPr>
-      <a:lvl7pPr marL="2743200" algn="l" defTabSz="914400" rtl="0" eaLnBrk="1" latinLnBrk="0" hangingPunct="1">
-        <a:defRPr sz="1800" kern="1200">
+      <a:lvl7pPr marL="2057400" algn="l" defTabSz="685800" rtl="0" eaLnBrk="1" latinLnBrk="0" hangingPunct="1">
+        <a:defRPr sz="1350" kern="1200">
           <a:solidFill>
             <a:schemeClr val="tx1"/>
           </a:solidFill>
@@ -4954,8 +7474,8 @@
           <a:cs typeface="+mn-cs"/>
         </a:defRPr>
       </a:lvl7pPr>
-      <a:lvl8pPr marL="3200400" algn="l" defTabSz="914400" rtl="0" eaLnBrk="1" latinLnBrk="0" hangingPunct="1">
-        <a:defRPr sz="1800" kern="1200">
+      <a:lvl8pPr marL="2400300" algn="l" defTabSz="685800" rtl="0" eaLnBrk="1" latinLnBrk="0" hangingPunct="1">
+        <a:defRPr sz="1350" kern="1200">
           <a:solidFill>
             <a:schemeClr val="tx1"/>
           </a:solidFill>
@@ -4964,8 +7484,8 @@
           <a:cs typeface="+mn-cs"/>
         </a:defRPr>
       </a:lvl8pPr>
-      <a:lvl9pPr marL="3657600" algn="l" defTabSz="914400" rtl="0" eaLnBrk="1" latinLnBrk="0" hangingPunct="1">
-        <a:defRPr sz="1800" kern="1200">
+      <a:lvl9pPr marL="2743200" algn="l" defTabSz="685800" rtl="0" eaLnBrk="1" latinLnBrk="0" hangingPunct="1">
+        <a:defRPr sz="1350" kern="1200">
           <a:solidFill>
             <a:schemeClr val="tx1"/>
           </a:solidFill>
@@ -5897,6 +8417,769 @@
 
 <file path=ppt/slides/slide10.xml><?xml version="1.0" encoding="utf-8"?>
 <p:sld xmlns:a="http://schemas.openxmlformats.org/drawingml/2006/main" xmlns:r="http://schemas.openxmlformats.org/officeDocument/2006/relationships" xmlns:p="http://schemas.openxmlformats.org/presentationml/2006/main">
+  <p:cSld name="Slide 11">
+    <p:bg>
+      <p:bgPr>
+        <a:solidFill>
+          <a:srgbClr val="0B1120"/>
+        </a:solidFill>
+        <a:effectLst/>
+      </p:bgPr>
+    </p:bg>
+    <p:spTree>
+      <p:nvGrpSpPr>
+        <p:cNvPr id="1" name=""/>
+        <p:cNvGrpSpPr/>
+        <p:nvPr/>
+      </p:nvGrpSpPr>
+      <p:grpSpPr>
+        <a:xfrm>
+          <a:off x="0" y="0"/>
+          <a:ext cx="0" cy="0"/>
+          <a:chOff x="0" y="0"/>
+          <a:chExt cx="0" cy="0"/>
+        </a:xfrm>
+      </p:grpSpPr>
+      <p:sp>
+        <p:nvSpPr>
+          <p:cNvPr id="2" name="Shape 0"/>
+          <p:cNvSpPr/>
+          <p:nvPr/>
+        </p:nvSpPr>
+        <p:spPr>
+          <a:xfrm>
+            <a:off x="0" y="0"/>
+            <a:ext cx="9144000" cy="640080"/>
+          </a:xfrm>
+          <a:prstGeom prst="rect">
+            <a:avLst/>
+          </a:prstGeom>
+          <a:solidFill>
+            <a:srgbClr val="0F1E3C"/>
+          </a:solidFill>
+          <a:ln w="12700">
+            <a:solidFill>
+              <a:srgbClr val="0F1E3C"/>
+            </a:solidFill>
+            <a:prstDash val="solid"/>
+          </a:ln>
+        </p:spPr>
+      </p:sp>
+      <p:sp>
+        <p:nvSpPr>
+          <p:cNvPr id="3" name="Shape 1"/>
+          <p:cNvSpPr/>
+          <p:nvPr/>
+        </p:nvSpPr>
+        <p:spPr>
+          <a:xfrm>
+            <a:off x="0" y="0"/>
+            <a:ext cx="320040" cy="640080"/>
+          </a:xfrm>
+          <a:prstGeom prst="rect">
+            <a:avLst/>
+          </a:prstGeom>
+          <a:solidFill>
+            <a:srgbClr val="00C2CB"/>
+          </a:solidFill>
+          <a:ln w="12700">
+            <a:solidFill>
+              <a:srgbClr val="00C2CB"/>
+            </a:solidFill>
+            <a:prstDash val="solid"/>
+          </a:ln>
+        </p:spPr>
+      </p:sp>
+      <p:sp>
+        <p:nvSpPr>
+          <p:cNvPr id="4" name="Text 2"/>
+          <p:cNvSpPr/>
+          <p:nvPr/>
+        </p:nvSpPr>
+        <p:spPr>
+          <a:xfrm>
+            <a:off x="457200" y="73152"/>
+            <a:ext cx="8229600" cy="457200"/>
+          </a:xfrm>
+          <a:prstGeom prst="rect">
+            <a:avLst/>
+          </a:prstGeom>
+          <a:noFill/>
+          <a:ln/>
+        </p:spPr>
+        <p:txBody>
+          <a:bodyPr wrap="square" lIns="0" tIns="0" rIns="0" bIns="0" rtlCol="0" anchor="ctr"/>
+          <a:lstStyle/>
+          <a:p>
+            <a:pPr marL="0" indent="0">
+              <a:buNone/>
+            </a:pPr>
+            <a:r>
+              <a:rPr lang="en-US" sz="2000" b="1" dirty="0">
+                <a:solidFill>
+                  <a:srgbClr val="F0F4FF"/>
+                </a:solidFill>
+                <a:latin typeface="Calibri" pitchFamily="34" charset="0"/>
+                <a:ea typeface="Calibri" pitchFamily="34" charset="-122"/>
+                <a:cs typeface="Calibri" pitchFamily="34" charset="-120"/>
+              </a:rPr>
+              <a:t>Customer Age &amp; Loyalty Analysis</a:t>
+            </a:r>
+            <a:endParaRPr lang="en-US" sz="2000" dirty="0"/>
+          </a:p>
+        </p:txBody>
+      </p:sp>
+      <p:sp>
+        <p:nvSpPr>
+          <p:cNvPr id="5" name="Text 3"/>
+          <p:cNvSpPr/>
+          <p:nvPr/>
+        </p:nvSpPr>
+        <p:spPr>
+          <a:xfrm>
+            <a:off x="457200" y="658368"/>
+            <a:ext cx="8229600" cy="256032"/>
+          </a:xfrm>
+          <a:prstGeom prst="rect">
+            <a:avLst/>
+          </a:prstGeom>
+          <a:noFill/>
+          <a:ln/>
+        </p:spPr>
+        <p:txBody>
+          <a:bodyPr wrap="square" lIns="0" tIns="0" rIns="0" bIns="0" rtlCol="0" anchor="ctr"/>
+          <a:lstStyle/>
+          <a:p>
+            <a:pPr marL="0" indent="0">
+              <a:buNone/>
+            </a:pPr>
+            <a:r>
+              <a:rPr lang="en-US" sz="1100" dirty="0">
+                <a:solidFill>
+                  <a:srgbClr val="8B9AB5"/>
+                </a:solidFill>
+                <a:latin typeface="Calibri" pitchFamily="34" charset="0"/>
+                <a:ea typeface="Calibri" pitchFamily="34" charset="-122"/>
+                <a:cs typeface="Calibri" pitchFamily="34" charset="-120"/>
+              </a:rPr>
+              <a:t>Demographic breakdown and loyalty program performance</a:t>
+            </a:r>
+            <a:endParaRPr lang="en-US" sz="1100" dirty="0"/>
+          </a:p>
+        </p:txBody>
+      </p:sp>
+      <p:sp>
+        <p:nvSpPr>
+          <p:cNvPr id="6" name="Shape 4"/>
+          <p:cNvSpPr/>
+          <p:nvPr/>
+        </p:nvSpPr>
+        <p:spPr>
+          <a:xfrm>
+            <a:off x="0" y="4956048"/>
+            <a:ext cx="9144000" cy="182880"/>
+          </a:xfrm>
+          <a:prstGeom prst="rect">
+            <a:avLst/>
+          </a:prstGeom>
+          <a:solidFill>
+            <a:srgbClr val="0F1E3C"/>
+          </a:solidFill>
+          <a:ln w="12700">
+            <a:solidFill>
+              <a:srgbClr val="0F1E3C"/>
+            </a:solidFill>
+            <a:prstDash val="solid"/>
+          </a:ln>
+        </p:spPr>
+      </p:sp>
+      <p:sp>
+        <p:nvSpPr>
+          <p:cNvPr id="7" name="Text 5"/>
+          <p:cNvSpPr/>
+          <p:nvPr/>
+        </p:nvSpPr>
+        <p:spPr>
+          <a:xfrm>
+            <a:off x="274320" y="4974336"/>
+            <a:ext cx="8595360" cy="146304"/>
+          </a:xfrm>
+          <a:prstGeom prst="rect">
+            <a:avLst/>
+          </a:prstGeom>
+          <a:noFill/>
+          <a:ln/>
+        </p:spPr>
+        <p:txBody>
+          <a:bodyPr wrap="square" lIns="0" tIns="0" rIns="0" bIns="0" rtlCol="0" anchor="ctr"/>
+          <a:lstStyle/>
+          <a:p>
+            <a:pPr marL="0" indent="0">
+              <a:buNone/>
+            </a:pPr>
+            <a:r>
+              <a:rPr lang="en-US" sz="800" dirty="0">
+                <a:solidFill>
+                  <a:srgbClr val="8B9AB5"/>
+                </a:solidFill>
+                <a:latin typeface="Calibri" pitchFamily="34" charset="0"/>
+                <a:ea typeface="Calibri" pitchFamily="34" charset="-122"/>
+                <a:cs typeface="Calibri" pitchFamily="34" charset="-120"/>
+              </a:rPr>
+              <a:t>Electronics Sales Analysis  |  Sep 2023 – Sep 2024  |  Kaggle Dataset  |  20,000 Records</a:t>
+            </a:r>
+            <a:endParaRPr lang="en-US" sz="800" dirty="0"/>
+          </a:p>
+        </p:txBody>
+      </p:sp>
+      <p:graphicFrame>
+        <p:nvGraphicFramePr>
+          <p:cNvPr id="8" name="Chart 0"/>
+          <p:cNvGraphicFramePr/>
+          <p:nvPr/>
+        </p:nvGraphicFramePr>
+        <p:xfrm>
+          <a:off x="274320" y="914400"/>
+          <a:ext cx="5029200" cy="3200400"/>
+        </p:xfrm>
+        <a:graphic>
+          <a:graphicData uri="http://schemas.openxmlformats.org/drawingml/2006/chart">
+            <c:chart xmlns:c="http://schemas.openxmlformats.org/drawingml/2006/chart" xmlns:r="http://schemas.openxmlformats.org/officeDocument/2006/relationships" r:id="rId3"/>
+          </a:graphicData>
+        </a:graphic>
+      </p:graphicFrame>
+      <p:sp>
+        <p:nvSpPr>
+          <p:cNvPr id="9" name="Shape 6"/>
+          <p:cNvSpPr/>
+          <p:nvPr/>
+        </p:nvSpPr>
+        <p:spPr>
+          <a:xfrm>
+            <a:off x="5669280" y="914400"/>
+            <a:ext cx="3200400" cy="1234440"/>
+          </a:xfrm>
+          <a:prstGeom prst="rect">
+            <a:avLst/>
+          </a:prstGeom>
+          <a:solidFill>
+            <a:srgbClr val="132038"/>
+          </a:solidFill>
+          <a:ln w="12700">
+            <a:solidFill>
+              <a:srgbClr val="1E3558"/>
+            </a:solidFill>
+            <a:prstDash val="solid"/>
+          </a:ln>
+          <a:effectLst>
+            <a:outerShdw blurRad="101600" dist="38100" dir="8100000" algn="bl" rotWithShape="0">
+              <a:srgbClr val="000000">
+                <a:alpha val="20000"/>
+              </a:srgbClr>
+            </a:outerShdw>
+          </a:effectLst>
+        </p:spPr>
+      </p:sp>
+      <p:sp>
+        <p:nvSpPr>
+          <p:cNvPr id="10" name="Shape 7"/>
+          <p:cNvSpPr/>
+          <p:nvPr/>
+        </p:nvSpPr>
+        <p:spPr>
+          <a:xfrm>
+            <a:off x="5669280" y="914400"/>
+            <a:ext cx="3200400" cy="64008"/>
+          </a:xfrm>
+          <a:prstGeom prst="rect">
+            <a:avLst/>
+          </a:prstGeom>
+          <a:solidFill>
+            <a:srgbClr val="00C2CB"/>
+          </a:solidFill>
+          <a:ln w="12700">
+            <a:solidFill>
+              <a:srgbClr val="00C2CB"/>
+            </a:solidFill>
+            <a:prstDash val="solid"/>
+          </a:ln>
+        </p:spPr>
+      </p:sp>
+      <p:sp>
+        <p:nvSpPr>
+          <p:cNvPr id="11" name="Text 8"/>
+          <p:cNvSpPr/>
+          <p:nvPr/>
+        </p:nvSpPr>
+        <p:spPr>
+          <a:xfrm>
+            <a:off x="5806440" y="1024128"/>
+            <a:ext cx="2926080" cy="228600"/>
+          </a:xfrm>
+          <a:prstGeom prst="rect">
+            <a:avLst/>
+          </a:prstGeom>
+          <a:noFill/>
+          <a:ln/>
+        </p:spPr>
+        <p:txBody>
+          <a:bodyPr wrap="square" lIns="0" tIns="0" rIns="0" bIns="0" rtlCol="0" anchor="ctr"/>
+          <a:lstStyle/>
+          <a:p>
+            <a:pPr marL="0" indent="0">
+              <a:buNone/>
+            </a:pPr>
+            <a:r>
+              <a:rPr lang="en-US" sz="850" b="1" kern="0" spc="200" dirty="0">
+                <a:solidFill>
+                  <a:srgbClr val="8B9AB5"/>
+                </a:solidFill>
+                <a:latin typeface="Calibri" pitchFamily="34" charset="0"/>
+                <a:ea typeface="Calibri" pitchFamily="34" charset="-122"/>
+                <a:cs typeface="Calibri" pitchFamily="34" charset="-120"/>
+              </a:rPr>
+              <a:t>LOYALTY MEMBERS</a:t>
+            </a:r>
+            <a:endParaRPr lang="en-US" sz="850" dirty="0"/>
+          </a:p>
+        </p:txBody>
+      </p:sp>
+      <p:sp>
+        <p:nvSpPr>
+          <p:cNvPr id="12" name="Text 9"/>
+          <p:cNvSpPr/>
+          <p:nvPr/>
+        </p:nvSpPr>
+        <p:spPr>
+          <a:xfrm>
+            <a:off x="5806440" y="1261872"/>
+            <a:ext cx="2926080" cy="548640"/>
+          </a:xfrm>
+          <a:prstGeom prst="rect">
+            <a:avLst/>
+          </a:prstGeom>
+          <a:noFill/>
+          <a:ln/>
+        </p:spPr>
+        <p:txBody>
+          <a:bodyPr wrap="square" lIns="0" tIns="0" rIns="0" bIns="0" rtlCol="0" anchor="ctr"/>
+          <a:lstStyle/>
+          <a:p>
+            <a:pPr marL="0" indent="0">
+              <a:buNone/>
+            </a:pPr>
+            <a:r>
+              <a:rPr lang="en-US" sz="2800" b="1" dirty="0">
+                <a:solidFill>
+                  <a:srgbClr val="00C2CB"/>
+                </a:solidFill>
+                <a:latin typeface="Calibri" pitchFamily="34" charset="0"/>
+                <a:ea typeface="Calibri" pitchFamily="34" charset="-122"/>
+                <a:cs typeface="Calibri" pitchFamily="34" charset="-120"/>
+              </a:rPr>
+              <a:t>4,343</a:t>
+            </a:r>
+            <a:endParaRPr lang="en-US" sz="2800" dirty="0"/>
+          </a:p>
+        </p:txBody>
+      </p:sp>
+      <p:sp>
+        <p:nvSpPr>
+          <p:cNvPr id="13" name="Text 10"/>
+          <p:cNvSpPr/>
+          <p:nvPr/>
+        </p:nvSpPr>
+        <p:spPr>
+          <a:xfrm>
+            <a:off x="5806440" y="1810512"/>
+            <a:ext cx="2926080" cy="228600"/>
+          </a:xfrm>
+          <a:prstGeom prst="rect">
+            <a:avLst/>
+          </a:prstGeom>
+          <a:noFill/>
+          <a:ln/>
+        </p:spPr>
+        <p:txBody>
+          <a:bodyPr wrap="square" lIns="0" tIns="0" rIns="0" bIns="0" rtlCol="0" anchor="ctr"/>
+          <a:lstStyle/>
+          <a:p>
+            <a:pPr marL="0" indent="0">
+              <a:buNone/>
+            </a:pPr>
+            <a:r>
+              <a:rPr lang="en-US" sz="900" dirty="0">
+                <a:solidFill>
+                  <a:srgbClr val="8B9AB5"/>
+                </a:solidFill>
+                <a:latin typeface="Calibri" pitchFamily="34" charset="0"/>
+                <a:ea typeface="Calibri" pitchFamily="34" charset="-122"/>
+                <a:cs typeface="Calibri" pitchFamily="34" charset="-120"/>
+              </a:rPr>
+              <a:t>21.7% of all customers</a:t>
+            </a:r>
+            <a:endParaRPr lang="en-US" sz="900" dirty="0"/>
+          </a:p>
+        </p:txBody>
+      </p:sp>
+      <p:sp>
+        <p:nvSpPr>
+          <p:cNvPr id="14" name="Shape 11"/>
+          <p:cNvSpPr/>
+          <p:nvPr/>
+        </p:nvSpPr>
+        <p:spPr>
+          <a:xfrm>
+            <a:off x="5669280" y="2286000"/>
+            <a:ext cx="3200400" cy="1234440"/>
+          </a:xfrm>
+          <a:prstGeom prst="rect">
+            <a:avLst/>
+          </a:prstGeom>
+          <a:solidFill>
+            <a:srgbClr val="132038"/>
+          </a:solidFill>
+          <a:ln w="12700">
+            <a:solidFill>
+              <a:srgbClr val="1E3558"/>
+            </a:solidFill>
+            <a:prstDash val="solid"/>
+          </a:ln>
+          <a:effectLst>
+            <a:outerShdw blurRad="101600" dist="38100" dir="8100000" algn="bl" rotWithShape="0">
+              <a:srgbClr val="000000">
+                <a:alpha val="20000"/>
+              </a:srgbClr>
+            </a:outerShdw>
+          </a:effectLst>
+        </p:spPr>
+      </p:sp>
+      <p:sp>
+        <p:nvSpPr>
+          <p:cNvPr id="15" name="Shape 12"/>
+          <p:cNvSpPr/>
+          <p:nvPr/>
+        </p:nvSpPr>
+        <p:spPr>
+          <a:xfrm>
+            <a:off x="5669280" y="2286000"/>
+            <a:ext cx="3200400" cy="64008"/>
+          </a:xfrm>
+          <a:prstGeom prst="rect">
+            <a:avLst/>
+          </a:prstGeom>
+          <a:solidFill>
+            <a:srgbClr val="F5A623"/>
+          </a:solidFill>
+          <a:ln w="12700">
+            <a:solidFill>
+              <a:srgbClr val="F5A623"/>
+            </a:solidFill>
+            <a:prstDash val="solid"/>
+          </a:ln>
+        </p:spPr>
+      </p:sp>
+      <p:sp>
+        <p:nvSpPr>
+          <p:cNvPr id="16" name="Text 13"/>
+          <p:cNvSpPr/>
+          <p:nvPr/>
+        </p:nvSpPr>
+        <p:spPr>
+          <a:xfrm>
+            <a:off x="5806440" y="2395728"/>
+            <a:ext cx="2926080" cy="228600"/>
+          </a:xfrm>
+          <a:prstGeom prst="rect">
+            <a:avLst/>
+          </a:prstGeom>
+          <a:noFill/>
+          <a:ln/>
+        </p:spPr>
+        <p:txBody>
+          <a:bodyPr wrap="square" lIns="0" tIns="0" rIns="0" bIns="0" rtlCol="0" anchor="ctr"/>
+          <a:lstStyle/>
+          <a:p>
+            <a:pPr marL="0" indent="0">
+              <a:buNone/>
+            </a:pPr>
+            <a:r>
+              <a:rPr lang="en-US" sz="850" b="1" kern="0" spc="200" dirty="0">
+                <a:solidFill>
+                  <a:srgbClr val="8B9AB5"/>
+                </a:solidFill>
+                <a:latin typeface="Calibri" pitchFamily="34" charset="0"/>
+                <a:ea typeface="Calibri" pitchFamily="34" charset="-122"/>
+                <a:cs typeface="Calibri" pitchFamily="34" charset="-120"/>
+              </a:rPr>
+              <a:t>LOYALTY REVENUE</a:t>
+            </a:r>
+            <a:endParaRPr lang="en-US" sz="850" dirty="0"/>
+          </a:p>
+        </p:txBody>
+      </p:sp>
+      <p:sp>
+        <p:nvSpPr>
+          <p:cNvPr id="17" name="Text 14"/>
+          <p:cNvSpPr/>
+          <p:nvPr/>
+        </p:nvSpPr>
+        <p:spPr>
+          <a:xfrm>
+            <a:off x="5806440" y="2633472"/>
+            <a:ext cx="2926080" cy="548640"/>
+          </a:xfrm>
+          <a:prstGeom prst="rect">
+            <a:avLst/>
+          </a:prstGeom>
+          <a:noFill/>
+          <a:ln/>
+        </p:spPr>
+        <p:txBody>
+          <a:bodyPr wrap="square" lIns="0" tIns="0" rIns="0" bIns="0" rtlCol="0" anchor="ctr"/>
+          <a:lstStyle/>
+          <a:p>
+            <a:pPr marL="0" indent="0">
+              <a:buNone/>
+            </a:pPr>
+            <a:r>
+              <a:rPr lang="en-US" sz="2800" b="1" dirty="0">
+                <a:solidFill>
+                  <a:srgbClr val="F5A623"/>
+                </a:solidFill>
+                <a:latin typeface="Calibri" pitchFamily="34" charset="0"/>
+                <a:ea typeface="Calibri" pitchFamily="34" charset="-122"/>
+                <a:cs typeface="Calibri" pitchFamily="34" charset="-120"/>
+              </a:rPr>
+              <a:t>$13.6M</a:t>
+            </a:r>
+            <a:endParaRPr lang="en-US" sz="2800" dirty="0"/>
+          </a:p>
+        </p:txBody>
+      </p:sp>
+      <p:sp>
+        <p:nvSpPr>
+          <p:cNvPr id="18" name="Text 15"/>
+          <p:cNvSpPr/>
+          <p:nvPr/>
+        </p:nvSpPr>
+        <p:spPr>
+          <a:xfrm>
+            <a:off x="5806440" y="3182112"/>
+            <a:ext cx="2926080" cy="228600"/>
+          </a:xfrm>
+          <a:prstGeom prst="rect">
+            <a:avLst/>
+          </a:prstGeom>
+          <a:noFill/>
+          <a:ln/>
+        </p:spPr>
+        <p:txBody>
+          <a:bodyPr wrap="square" lIns="0" tIns="0" rIns="0" bIns="0" rtlCol="0" anchor="ctr"/>
+          <a:lstStyle/>
+          <a:p>
+            <a:pPr marL="0" indent="0">
+              <a:buNone/>
+            </a:pPr>
+            <a:r>
+              <a:rPr lang="en-US" sz="900" dirty="0">
+                <a:solidFill>
+                  <a:srgbClr val="8B9AB5"/>
+                </a:solidFill>
+                <a:latin typeface="Calibri" pitchFamily="34" charset="0"/>
+                <a:ea typeface="Calibri" pitchFamily="34" charset="-122"/>
+                <a:cs typeface="Calibri" pitchFamily="34" charset="-120"/>
+              </a:rPr>
+              <a:t>21.4% of total revenue</a:t>
+            </a:r>
+            <a:endParaRPr lang="en-US" sz="900" dirty="0"/>
+          </a:p>
+        </p:txBody>
+      </p:sp>
+      <p:sp>
+        <p:nvSpPr>
+          <p:cNvPr id="19" name="Shape 16"/>
+          <p:cNvSpPr/>
+          <p:nvPr/>
+        </p:nvSpPr>
+        <p:spPr>
+          <a:xfrm>
+            <a:off x="5669280" y="3520440"/>
+            <a:ext cx="3200400" cy="1234440"/>
+          </a:xfrm>
+          <a:prstGeom prst="rect">
+            <a:avLst/>
+          </a:prstGeom>
+          <a:solidFill>
+            <a:srgbClr val="132038"/>
+          </a:solidFill>
+          <a:ln w="12700">
+            <a:solidFill>
+              <a:srgbClr val="1E3558"/>
+            </a:solidFill>
+            <a:prstDash val="solid"/>
+          </a:ln>
+          <a:effectLst>
+            <a:outerShdw blurRad="101600" dist="38100" dir="8100000" algn="bl" rotWithShape="0">
+              <a:srgbClr val="000000">
+                <a:alpha val="20000"/>
+              </a:srgbClr>
+            </a:outerShdw>
+          </a:effectLst>
+        </p:spPr>
+      </p:sp>
+      <p:sp>
+        <p:nvSpPr>
+          <p:cNvPr id="20" name="Shape 17"/>
+          <p:cNvSpPr/>
+          <p:nvPr/>
+        </p:nvSpPr>
+        <p:spPr>
+          <a:xfrm>
+            <a:off x="5669280" y="3520440"/>
+            <a:ext cx="3200400" cy="64008"/>
+          </a:xfrm>
+          <a:prstGeom prst="rect">
+            <a:avLst/>
+          </a:prstGeom>
+          <a:solidFill>
+            <a:srgbClr val="2ECC97"/>
+          </a:solidFill>
+          <a:ln w="12700">
+            <a:solidFill>
+              <a:srgbClr val="2ECC97"/>
+            </a:solidFill>
+            <a:prstDash val="solid"/>
+          </a:ln>
+        </p:spPr>
+      </p:sp>
+      <p:sp>
+        <p:nvSpPr>
+          <p:cNvPr id="21" name="Text 18"/>
+          <p:cNvSpPr/>
+          <p:nvPr/>
+        </p:nvSpPr>
+        <p:spPr>
+          <a:xfrm>
+            <a:off x="5806440" y="3630168"/>
+            <a:ext cx="2926080" cy="228600"/>
+          </a:xfrm>
+          <a:prstGeom prst="rect">
+            <a:avLst/>
+          </a:prstGeom>
+          <a:noFill/>
+          <a:ln/>
+        </p:spPr>
+        <p:txBody>
+          <a:bodyPr wrap="square" lIns="0" tIns="0" rIns="0" bIns="0" rtlCol="0" anchor="ctr"/>
+          <a:lstStyle/>
+          <a:p>
+            <a:pPr marL="0" indent="0">
+              <a:buNone/>
+            </a:pPr>
+            <a:r>
+              <a:rPr lang="en-US" sz="850" b="1" kern="0" spc="200" dirty="0">
+                <a:solidFill>
+                  <a:srgbClr val="8B9AB5"/>
+                </a:solidFill>
+                <a:latin typeface="Calibri" pitchFamily="34" charset="0"/>
+                <a:ea typeface="Calibri" pitchFamily="34" charset="-122"/>
+                <a:cs typeface="Calibri" pitchFamily="34" charset="-120"/>
+              </a:rPr>
+              <a:t>TOP BUYER AGE GROUP</a:t>
+            </a:r>
+            <a:endParaRPr lang="en-US" sz="850" dirty="0"/>
+          </a:p>
+        </p:txBody>
+      </p:sp>
+      <p:sp>
+        <p:nvSpPr>
+          <p:cNvPr id="22" name="Text 19"/>
+          <p:cNvSpPr/>
+          <p:nvPr/>
+        </p:nvSpPr>
+        <p:spPr>
+          <a:xfrm>
+            <a:off x="5806440" y="3867912"/>
+            <a:ext cx="2926080" cy="548640"/>
+          </a:xfrm>
+          <a:prstGeom prst="rect">
+            <a:avLst/>
+          </a:prstGeom>
+          <a:noFill/>
+          <a:ln/>
+        </p:spPr>
+        <p:txBody>
+          <a:bodyPr wrap="square" lIns="0" tIns="0" rIns="0" bIns="0" rtlCol="0" anchor="ctr"/>
+          <a:lstStyle/>
+          <a:p>
+            <a:pPr marL="0" indent="0">
+              <a:buNone/>
+            </a:pPr>
+            <a:r>
+              <a:rPr lang="en-US" sz="2800" b="1" dirty="0">
+                <a:solidFill>
+                  <a:srgbClr val="2ECC97"/>
+                </a:solidFill>
+                <a:latin typeface="Calibri" pitchFamily="34" charset="0"/>
+                <a:ea typeface="Calibri" pitchFamily="34" charset="-122"/>
+                <a:cs typeface="Calibri" pitchFamily="34" charset="-120"/>
+              </a:rPr>
+              <a:t>65+</a:t>
+            </a:r>
+            <a:endParaRPr lang="en-US" sz="2800" dirty="0"/>
+          </a:p>
+        </p:txBody>
+      </p:sp>
+      <p:sp>
+        <p:nvSpPr>
+          <p:cNvPr id="23" name="Text 20"/>
+          <p:cNvSpPr/>
+          <p:nvPr/>
+        </p:nvSpPr>
+        <p:spPr>
+          <a:xfrm>
+            <a:off x="5806440" y="4416552"/>
+            <a:ext cx="2926080" cy="228600"/>
+          </a:xfrm>
+          <a:prstGeom prst="rect">
+            <a:avLst/>
+          </a:prstGeom>
+          <a:noFill/>
+          <a:ln/>
+        </p:spPr>
+        <p:txBody>
+          <a:bodyPr wrap="square" lIns="0" tIns="0" rIns="0" bIns="0" rtlCol="0" anchor="ctr"/>
+          <a:lstStyle/>
+          <a:p>
+            <a:pPr marL="0" indent="0">
+              <a:buNone/>
+            </a:pPr>
+            <a:r>
+              <a:rPr lang="en-US" sz="900" dirty="0">
+                <a:solidFill>
+                  <a:srgbClr val="8B9AB5"/>
+                </a:solidFill>
+                <a:latin typeface="Calibri" pitchFamily="34" charset="0"/>
+                <a:ea typeface="Calibri" pitchFamily="34" charset="-122"/>
+                <a:cs typeface="Calibri" pitchFamily="34" charset="-120"/>
+              </a:rPr>
+              <a:t>4,711 customers (23.6%)</a:t>
+            </a:r>
+            <a:endParaRPr lang="en-US" sz="900" dirty="0"/>
+          </a:p>
+        </p:txBody>
+      </p:sp>
+    </p:spTree>
+  </p:cSld>
+  <p:clrMapOvr>
+    <a:masterClrMapping/>
+  </p:clrMapOvr>
+</p:sld>
+</file>
+
+<file path=ppt/slides/slide11.xml><?xml version="1.0" encoding="utf-8"?>
+<p:sld xmlns:a="http://schemas.openxmlformats.org/drawingml/2006/main" xmlns:r="http://schemas.openxmlformats.org/officeDocument/2006/relationships" xmlns:p="http://schemas.openxmlformats.org/presentationml/2006/main">
   <p:cSld name="Slide 12">
     <p:bg>
       <p:bgPr>
@@ -6658,7 +9941,7 @@
 </p:sld>
 </file>
 
-<file path=ppt/slides/slide11.xml><?xml version="1.0" encoding="utf-8"?>
+<file path=ppt/slides/slide12.xml><?xml version="1.0" encoding="utf-8"?>
 <p:sld xmlns:a="http://schemas.openxmlformats.org/drawingml/2006/main" xmlns:r="http://schemas.openxmlformats.org/officeDocument/2006/relationships" xmlns:p="http://schemas.openxmlformats.org/presentationml/2006/main">
   <p:cSld name="Slide 13">
     <p:bg>
@@ -7693,7 +10976,7 @@
 </p:sld>
 </file>
 
-<file path=ppt/slides/slide12.xml><?xml version="1.0" encoding="utf-8"?>
+<file path=ppt/slides/slide13.xml><?xml version="1.0" encoding="utf-8"?>
 <p:sld xmlns:a="http://schemas.openxmlformats.org/drawingml/2006/main" xmlns:r="http://schemas.openxmlformats.org/officeDocument/2006/relationships" xmlns:p="http://schemas.openxmlformats.org/presentationml/2006/main">
   <p:cSld name="Slide 15">
     <p:bg>
@@ -8728,7 +12011,7 @@
 </p:sld>
 </file>
 
-<file path=ppt/slides/slide13.xml><?xml version="1.0" encoding="utf-8"?>
+<file path=ppt/slides/slide14.xml><?xml version="1.0" encoding="utf-8"?>
 <p:sld xmlns:a="http://schemas.openxmlformats.org/drawingml/2006/main" xmlns:r="http://schemas.openxmlformats.org/officeDocument/2006/relationships" xmlns:p="http://schemas.openxmlformats.org/presentationml/2006/main">
   <p:cSld name="Slide 16">
     <p:bg>
@@ -11036,6 +14319,94 @@
 
 <file path=ppt/slides/slide3.xml><?xml version="1.0" encoding="utf-8"?>
 <p:sld xmlns:a="http://schemas.openxmlformats.org/drawingml/2006/main" xmlns:r="http://schemas.openxmlformats.org/officeDocument/2006/relationships" xmlns:p="http://schemas.openxmlformats.org/presentationml/2006/main">
+  <p:cSld>
+    <p:spTree>
+      <p:nvGrpSpPr>
+        <p:cNvPr id="1" name=""/>
+        <p:cNvGrpSpPr/>
+        <p:nvPr/>
+      </p:nvGrpSpPr>
+      <p:grpSpPr>
+        <a:xfrm>
+          <a:off x="0" y="0"/>
+          <a:ext cx="0" cy="0"/>
+          <a:chOff x="0" y="0"/>
+          <a:chExt cx="0" cy="0"/>
+        </a:xfrm>
+      </p:grpSpPr>
+      <p:sp>
+        <p:nvSpPr>
+          <p:cNvPr id="3" name="TextBox 2">
+            <a:extLst>
+              <a:ext uri="{FF2B5EF4-FFF2-40B4-BE49-F238E27FC236}">
+                <a16:creationId xmlns:a16="http://schemas.microsoft.com/office/drawing/2014/main" id="{A0DBC55C-CC66-49F9-9EC8-3F021D1DE6CE}"/>
+              </a:ext>
+            </a:extLst>
+          </p:cNvPr>
+          <p:cNvSpPr txBox="1"/>
+          <p:nvPr/>
+        </p:nvSpPr>
+        <p:spPr>
+          <a:xfrm>
+            <a:off x="169682" y="172860"/>
+            <a:ext cx="6688318" cy="3693319"/>
+          </a:xfrm>
+          <a:prstGeom prst="rect">
+            <a:avLst/>
+          </a:prstGeom>
+          <a:noFill/>
+        </p:spPr>
+        <p:txBody>
+          <a:bodyPr wrap="square">
+            <a:spAutoFit/>
+          </a:bodyPr>
+          <a:lstStyle/>
+          <a:p>
+            <a:r>
+              <a:rPr lang="en-US" b="1" dirty="0"/>
+              <a:t>Project Overview:</a:t>
+            </a:r>
+          </a:p>
+          <a:p>
+            <a:endParaRPr lang="en-US" b="1" dirty="0"/>
+          </a:p>
+          <a:p>
+            <a:r>
+              <a:rPr lang="en-US" dirty="0"/>
+              <a:t>This project focuses on analyzing electronic sales transactions using Microsoft Excel to understand customer behavior, product performance, and sales trends. The dataset used in this analysis was obtained from Kaggle and contains simulated sales data for an electronics company over a one-year period from September 2023 to September 2024.</a:t>
+            </a:r>
+          </a:p>
+          <a:p>
+            <a:r>
+              <a:rPr lang="en-US" dirty="0"/>
+              <a:t>The dataset includes 20,000 transaction records with detailed information about customers, product types, payment methods, shipping types, order status, and add-on purchases. Using Excel tools such as PivotTables, </a:t>
+            </a:r>
+            <a:r>
+              <a:rPr lang="en-US" dirty="0" err="1"/>
+              <a:t>PivotCharts</a:t>
+            </a:r>
+            <a:r>
+              <a:rPr lang="en-US" dirty="0"/>
+              <a:t>, slicers, and KPIs, an interactive dashboard was created to visualize key business metrics.</a:t>
+            </a:r>
+          </a:p>
+        </p:txBody>
+      </p:sp>
+    </p:spTree>
+    <p:extLst>
+      <p:ext uri="{BB962C8B-B14F-4D97-AF65-F5344CB8AC3E}">
+        <p14:creationId xmlns:p14="http://schemas.microsoft.com/office/powerpoint/2010/main" val="3674747533"/>
+      </p:ext>
+    </p:extLst>
+  </p:cSld>
+  <p:clrMapOvr>
+    <a:masterClrMapping/>
+  </p:clrMapOvr>
+</p:sld>
+</file>
+
+<file path=ppt/slides/slide4.xml><?xml version="1.0" encoding="utf-8"?>
+<p:sld xmlns:a="http://schemas.openxmlformats.org/drawingml/2006/main" xmlns:r="http://schemas.openxmlformats.org/officeDocument/2006/relationships" xmlns:p="http://schemas.openxmlformats.org/presentationml/2006/main">
   <p:cSld name="Slide 4">
     <p:bg>
       <p:bgPr>
@@ -11339,7 +14710,7 @@
 </p:sld>
 </file>
 
-<file path=ppt/slides/slide4.xml><?xml version="1.0" encoding="utf-8"?>
+<file path=ppt/slides/slide5.xml><?xml version="1.0" encoding="utf-8"?>
 <p:sld xmlns:a="http://schemas.openxmlformats.org/drawingml/2006/main" xmlns:r="http://schemas.openxmlformats.org/officeDocument/2006/relationships" xmlns:p="http://schemas.openxmlformats.org/presentationml/2006/main">
   <p:cSld name="Slide 5">
     <p:bg>
@@ -11596,7 +14967,7 @@
 </p:sld>
 </file>
 
-<file path=ppt/slides/slide5.xml><?xml version="1.0" encoding="utf-8"?>
+<file path=ppt/slides/slide6.xml><?xml version="1.0" encoding="utf-8"?>
 <p:sld xmlns:a="http://schemas.openxmlformats.org/drawingml/2006/main" xmlns:r="http://schemas.openxmlformats.org/officeDocument/2006/relationships" xmlns:p="http://schemas.openxmlformats.org/presentationml/2006/main">
   <p:cSld name="Slide 6">
     <p:bg>
@@ -12359,7 +15730,7 @@
 </p:sld>
 </file>
 
-<file path=ppt/slides/slide6.xml><?xml version="1.0" encoding="utf-8"?>
+<file path=ppt/slides/slide7.xml><?xml version="1.0" encoding="utf-8"?>
 <p:sld xmlns:a="http://schemas.openxmlformats.org/drawingml/2006/main" xmlns:r="http://schemas.openxmlformats.org/officeDocument/2006/relationships" xmlns:p="http://schemas.openxmlformats.org/presentationml/2006/main">
   <p:cSld name="Slide 7">
     <p:bg>
@@ -13112,7 +16483,7 @@
 </p:sld>
 </file>
 
-<file path=ppt/slides/slide7.xml><?xml version="1.0" encoding="utf-8"?>
+<file path=ppt/slides/slide8.xml><?xml version="1.0" encoding="utf-8"?>
 <p:sld xmlns:a="http://schemas.openxmlformats.org/drawingml/2006/main" xmlns:r="http://schemas.openxmlformats.org/officeDocument/2006/relationships" xmlns:p="http://schemas.openxmlformats.org/presentationml/2006/main">
   <p:cSld name="Slide 8">
     <p:bg>
@@ -14188,7 +17559,7 @@
 </p:sld>
 </file>
 
-<file path=ppt/slides/slide8.xml><?xml version="1.0" encoding="utf-8"?>
+<file path=ppt/slides/slide9.xml><?xml version="1.0" encoding="utf-8"?>
 <p:sld xmlns:a="http://schemas.openxmlformats.org/drawingml/2006/main" xmlns:r="http://schemas.openxmlformats.org/officeDocument/2006/relationships" xmlns:p="http://schemas.openxmlformats.org/presentationml/2006/main">
   <p:cSld name="Slide 10">
     <p:bg>
@@ -14510,773 +17881,10 @@
 </p:sld>
 </file>
 
-<file path=ppt/slides/slide9.xml><?xml version="1.0" encoding="utf-8"?>
-<p:sld xmlns:a="http://schemas.openxmlformats.org/drawingml/2006/main" xmlns:r="http://schemas.openxmlformats.org/officeDocument/2006/relationships" xmlns:p="http://schemas.openxmlformats.org/presentationml/2006/main">
-  <p:cSld name="Slide 11">
-    <p:bg>
-      <p:bgPr>
-        <a:solidFill>
-          <a:srgbClr val="0B1120"/>
-        </a:solidFill>
-        <a:effectLst/>
-      </p:bgPr>
-    </p:bg>
-    <p:spTree>
-      <p:nvGrpSpPr>
-        <p:cNvPr id="1" name=""/>
-        <p:cNvGrpSpPr/>
-        <p:nvPr/>
-      </p:nvGrpSpPr>
-      <p:grpSpPr>
-        <a:xfrm>
-          <a:off x="0" y="0"/>
-          <a:ext cx="0" cy="0"/>
-          <a:chOff x="0" y="0"/>
-          <a:chExt cx="0" cy="0"/>
-        </a:xfrm>
-      </p:grpSpPr>
-      <p:sp>
-        <p:nvSpPr>
-          <p:cNvPr id="2" name="Shape 0"/>
-          <p:cNvSpPr/>
-          <p:nvPr/>
-        </p:nvSpPr>
-        <p:spPr>
-          <a:xfrm>
-            <a:off x="0" y="0"/>
-            <a:ext cx="9144000" cy="640080"/>
-          </a:xfrm>
-          <a:prstGeom prst="rect">
-            <a:avLst/>
-          </a:prstGeom>
-          <a:solidFill>
-            <a:srgbClr val="0F1E3C"/>
-          </a:solidFill>
-          <a:ln w="12700">
-            <a:solidFill>
-              <a:srgbClr val="0F1E3C"/>
-            </a:solidFill>
-            <a:prstDash val="solid"/>
-          </a:ln>
-        </p:spPr>
-      </p:sp>
-      <p:sp>
-        <p:nvSpPr>
-          <p:cNvPr id="3" name="Shape 1"/>
-          <p:cNvSpPr/>
-          <p:nvPr/>
-        </p:nvSpPr>
-        <p:spPr>
-          <a:xfrm>
-            <a:off x="0" y="0"/>
-            <a:ext cx="320040" cy="640080"/>
-          </a:xfrm>
-          <a:prstGeom prst="rect">
-            <a:avLst/>
-          </a:prstGeom>
-          <a:solidFill>
-            <a:srgbClr val="00C2CB"/>
-          </a:solidFill>
-          <a:ln w="12700">
-            <a:solidFill>
-              <a:srgbClr val="00C2CB"/>
-            </a:solidFill>
-            <a:prstDash val="solid"/>
-          </a:ln>
-        </p:spPr>
-      </p:sp>
-      <p:sp>
-        <p:nvSpPr>
-          <p:cNvPr id="4" name="Text 2"/>
-          <p:cNvSpPr/>
-          <p:nvPr/>
-        </p:nvSpPr>
-        <p:spPr>
-          <a:xfrm>
-            <a:off x="457200" y="73152"/>
-            <a:ext cx="8229600" cy="457200"/>
-          </a:xfrm>
-          <a:prstGeom prst="rect">
-            <a:avLst/>
-          </a:prstGeom>
-          <a:noFill/>
-          <a:ln/>
-        </p:spPr>
-        <p:txBody>
-          <a:bodyPr wrap="square" lIns="0" tIns="0" rIns="0" bIns="0" rtlCol="0" anchor="ctr"/>
-          <a:lstStyle/>
-          <a:p>
-            <a:pPr marL="0" indent="0">
-              <a:buNone/>
-            </a:pPr>
-            <a:r>
-              <a:rPr lang="en-US" sz="2000" b="1" dirty="0">
-                <a:solidFill>
-                  <a:srgbClr val="F0F4FF"/>
-                </a:solidFill>
-                <a:latin typeface="Calibri" pitchFamily="34" charset="0"/>
-                <a:ea typeface="Calibri" pitchFamily="34" charset="-122"/>
-                <a:cs typeface="Calibri" pitchFamily="34" charset="-120"/>
-              </a:rPr>
-              <a:t>Customer Age &amp; Loyalty Analysis</a:t>
-            </a:r>
-            <a:endParaRPr lang="en-US" sz="2000" dirty="0"/>
-          </a:p>
-        </p:txBody>
-      </p:sp>
-      <p:sp>
-        <p:nvSpPr>
-          <p:cNvPr id="5" name="Text 3"/>
-          <p:cNvSpPr/>
-          <p:nvPr/>
-        </p:nvSpPr>
-        <p:spPr>
-          <a:xfrm>
-            <a:off x="457200" y="658368"/>
-            <a:ext cx="8229600" cy="256032"/>
-          </a:xfrm>
-          <a:prstGeom prst="rect">
-            <a:avLst/>
-          </a:prstGeom>
-          <a:noFill/>
-          <a:ln/>
-        </p:spPr>
-        <p:txBody>
-          <a:bodyPr wrap="square" lIns="0" tIns="0" rIns="0" bIns="0" rtlCol="0" anchor="ctr"/>
-          <a:lstStyle/>
-          <a:p>
-            <a:pPr marL="0" indent="0">
-              <a:buNone/>
-            </a:pPr>
-            <a:r>
-              <a:rPr lang="en-US" sz="1100" dirty="0">
-                <a:solidFill>
-                  <a:srgbClr val="8B9AB5"/>
-                </a:solidFill>
-                <a:latin typeface="Calibri" pitchFamily="34" charset="0"/>
-                <a:ea typeface="Calibri" pitchFamily="34" charset="-122"/>
-                <a:cs typeface="Calibri" pitchFamily="34" charset="-120"/>
-              </a:rPr>
-              <a:t>Demographic breakdown and loyalty program performance</a:t>
-            </a:r>
-            <a:endParaRPr lang="en-US" sz="1100" dirty="0"/>
-          </a:p>
-        </p:txBody>
-      </p:sp>
-      <p:sp>
-        <p:nvSpPr>
-          <p:cNvPr id="6" name="Shape 4"/>
-          <p:cNvSpPr/>
-          <p:nvPr/>
-        </p:nvSpPr>
-        <p:spPr>
-          <a:xfrm>
-            <a:off x="0" y="4956048"/>
-            <a:ext cx="9144000" cy="182880"/>
-          </a:xfrm>
-          <a:prstGeom prst="rect">
-            <a:avLst/>
-          </a:prstGeom>
-          <a:solidFill>
-            <a:srgbClr val="0F1E3C"/>
-          </a:solidFill>
-          <a:ln w="12700">
-            <a:solidFill>
-              <a:srgbClr val="0F1E3C"/>
-            </a:solidFill>
-            <a:prstDash val="solid"/>
-          </a:ln>
-        </p:spPr>
-      </p:sp>
-      <p:sp>
-        <p:nvSpPr>
-          <p:cNvPr id="7" name="Text 5"/>
-          <p:cNvSpPr/>
-          <p:nvPr/>
-        </p:nvSpPr>
-        <p:spPr>
-          <a:xfrm>
-            <a:off x="274320" y="4974336"/>
-            <a:ext cx="8595360" cy="146304"/>
-          </a:xfrm>
-          <a:prstGeom prst="rect">
-            <a:avLst/>
-          </a:prstGeom>
-          <a:noFill/>
-          <a:ln/>
-        </p:spPr>
-        <p:txBody>
-          <a:bodyPr wrap="square" lIns="0" tIns="0" rIns="0" bIns="0" rtlCol="0" anchor="ctr"/>
-          <a:lstStyle/>
-          <a:p>
-            <a:pPr marL="0" indent="0">
-              <a:buNone/>
-            </a:pPr>
-            <a:r>
-              <a:rPr lang="en-US" sz="800" dirty="0">
-                <a:solidFill>
-                  <a:srgbClr val="8B9AB5"/>
-                </a:solidFill>
-                <a:latin typeface="Calibri" pitchFamily="34" charset="0"/>
-                <a:ea typeface="Calibri" pitchFamily="34" charset="-122"/>
-                <a:cs typeface="Calibri" pitchFamily="34" charset="-120"/>
-              </a:rPr>
-              <a:t>Electronics Sales Analysis  |  Sep 2023 – Sep 2024  |  Kaggle Dataset  |  20,000 Records</a:t>
-            </a:r>
-            <a:endParaRPr lang="en-US" sz="800" dirty="0"/>
-          </a:p>
-        </p:txBody>
-      </p:sp>
-      <p:graphicFrame>
-        <p:nvGraphicFramePr>
-          <p:cNvPr id="8" name="Chart 0"/>
-          <p:cNvGraphicFramePr/>
-          <p:nvPr/>
-        </p:nvGraphicFramePr>
-        <p:xfrm>
-          <a:off x="274320" y="914400"/>
-          <a:ext cx="5029200" cy="3200400"/>
-        </p:xfrm>
-        <a:graphic>
-          <a:graphicData uri="http://schemas.openxmlformats.org/drawingml/2006/chart">
-            <c:chart xmlns:c="http://schemas.openxmlformats.org/drawingml/2006/chart" xmlns:r="http://schemas.openxmlformats.org/officeDocument/2006/relationships" r:id="rId3"/>
-          </a:graphicData>
-        </a:graphic>
-      </p:graphicFrame>
-      <p:sp>
-        <p:nvSpPr>
-          <p:cNvPr id="9" name="Shape 6"/>
-          <p:cNvSpPr/>
-          <p:nvPr/>
-        </p:nvSpPr>
-        <p:spPr>
-          <a:xfrm>
-            <a:off x="5669280" y="914400"/>
-            <a:ext cx="3200400" cy="1234440"/>
-          </a:xfrm>
-          <a:prstGeom prst="rect">
-            <a:avLst/>
-          </a:prstGeom>
-          <a:solidFill>
-            <a:srgbClr val="132038"/>
-          </a:solidFill>
-          <a:ln w="12700">
-            <a:solidFill>
-              <a:srgbClr val="1E3558"/>
-            </a:solidFill>
-            <a:prstDash val="solid"/>
-          </a:ln>
-          <a:effectLst>
-            <a:outerShdw blurRad="101600" dist="38100" dir="8100000" algn="bl" rotWithShape="0">
-              <a:srgbClr val="000000">
-                <a:alpha val="20000"/>
-              </a:srgbClr>
-            </a:outerShdw>
-          </a:effectLst>
-        </p:spPr>
-      </p:sp>
-      <p:sp>
-        <p:nvSpPr>
-          <p:cNvPr id="10" name="Shape 7"/>
-          <p:cNvSpPr/>
-          <p:nvPr/>
-        </p:nvSpPr>
-        <p:spPr>
-          <a:xfrm>
-            <a:off x="5669280" y="914400"/>
-            <a:ext cx="3200400" cy="64008"/>
-          </a:xfrm>
-          <a:prstGeom prst="rect">
-            <a:avLst/>
-          </a:prstGeom>
-          <a:solidFill>
-            <a:srgbClr val="00C2CB"/>
-          </a:solidFill>
-          <a:ln w="12700">
-            <a:solidFill>
-              <a:srgbClr val="00C2CB"/>
-            </a:solidFill>
-            <a:prstDash val="solid"/>
-          </a:ln>
-        </p:spPr>
-      </p:sp>
-      <p:sp>
-        <p:nvSpPr>
-          <p:cNvPr id="11" name="Text 8"/>
-          <p:cNvSpPr/>
-          <p:nvPr/>
-        </p:nvSpPr>
-        <p:spPr>
-          <a:xfrm>
-            <a:off x="5806440" y="1024128"/>
-            <a:ext cx="2926080" cy="228600"/>
-          </a:xfrm>
-          <a:prstGeom prst="rect">
-            <a:avLst/>
-          </a:prstGeom>
-          <a:noFill/>
-          <a:ln/>
-        </p:spPr>
-        <p:txBody>
-          <a:bodyPr wrap="square" lIns="0" tIns="0" rIns="0" bIns="0" rtlCol="0" anchor="ctr"/>
-          <a:lstStyle/>
-          <a:p>
-            <a:pPr marL="0" indent="0">
-              <a:buNone/>
-            </a:pPr>
-            <a:r>
-              <a:rPr lang="en-US" sz="850" b="1" kern="0" spc="200" dirty="0">
-                <a:solidFill>
-                  <a:srgbClr val="8B9AB5"/>
-                </a:solidFill>
-                <a:latin typeface="Calibri" pitchFamily="34" charset="0"/>
-                <a:ea typeface="Calibri" pitchFamily="34" charset="-122"/>
-                <a:cs typeface="Calibri" pitchFamily="34" charset="-120"/>
-              </a:rPr>
-              <a:t>LOYALTY MEMBERS</a:t>
-            </a:r>
-            <a:endParaRPr lang="en-US" sz="850" dirty="0"/>
-          </a:p>
-        </p:txBody>
-      </p:sp>
-      <p:sp>
-        <p:nvSpPr>
-          <p:cNvPr id="12" name="Text 9"/>
-          <p:cNvSpPr/>
-          <p:nvPr/>
-        </p:nvSpPr>
-        <p:spPr>
-          <a:xfrm>
-            <a:off x="5806440" y="1261872"/>
-            <a:ext cx="2926080" cy="548640"/>
-          </a:xfrm>
-          <a:prstGeom prst="rect">
-            <a:avLst/>
-          </a:prstGeom>
-          <a:noFill/>
-          <a:ln/>
-        </p:spPr>
-        <p:txBody>
-          <a:bodyPr wrap="square" lIns="0" tIns="0" rIns="0" bIns="0" rtlCol="0" anchor="ctr"/>
-          <a:lstStyle/>
-          <a:p>
-            <a:pPr marL="0" indent="0">
-              <a:buNone/>
-            </a:pPr>
-            <a:r>
-              <a:rPr lang="en-US" sz="2800" b="1" dirty="0">
-                <a:solidFill>
-                  <a:srgbClr val="00C2CB"/>
-                </a:solidFill>
-                <a:latin typeface="Calibri" pitchFamily="34" charset="0"/>
-                <a:ea typeface="Calibri" pitchFamily="34" charset="-122"/>
-                <a:cs typeface="Calibri" pitchFamily="34" charset="-120"/>
-              </a:rPr>
-              <a:t>4,343</a:t>
-            </a:r>
-            <a:endParaRPr lang="en-US" sz="2800" dirty="0"/>
-          </a:p>
-        </p:txBody>
-      </p:sp>
-      <p:sp>
-        <p:nvSpPr>
-          <p:cNvPr id="13" name="Text 10"/>
-          <p:cNvSpPr/>
-          <p:nvPr/>
-        </p:nvSpPr>
-        <p:spPr>
-          <a:xfrm>
-            <a:off x="5806440" y="1810512"/>
-            <a:ext cx="2926080" cy="228600"/>
-          </a:xfrm>
-          <a:prstGeom prst="rect">
-            <a:avLst/>
-          </a:prstGeom>
-          <a:noFill/>
-          <a:ln/>
-        </p:spPr>
-        <p:txBody>
-          <a:bodyPr wrap="square" lIns="0" tIns="0" rIns="0" bIns="0" rtlCol="0" anchor="ctr"/>
-          <a:lstStyle/>
-          <a:p>
-            <a:pPr marL="0" indent="0">
-              <a:buNone/>
-            </a:pPr>
-            <a:r>
-              <a:rPr lang="en-US" sz="900" dirty="0">
-                <a:solidFill>
-                  <a:srgbClr val="8B9AB5"/>
-                </a:solidFill>
-                <a:latin typeface="Calibri" pitchFamily="34" charset="0"/>
-                <a:ea typeface="Calibri" pitchFamily="34" charset="-122"/>
-                <a:cs typeface="Calibri" pitchFamily="34" charset="-120"/>
-              </a:rPr>
-              <a:t>21.7% of all customers</a:t>
-            </a:r>
-            <a:endParaRPr lang="en-US" sz="900" dirty="0"/>
-          </a:p>
-        </p:txBody>
-      </p:sp>
-      <p:sp>
-        <p:nvSpPr>
-          <p:cNvPr id="14" name="Shape 11"/>
-          <p:cNvSpPr/>
-          <p:nvPr/>
-        </p:nvSpPr>
-        <p:spPr>
-          <a:xfrm>
-            <a:off x="5669280" y="2286000"/>
-            <a:ext cx="3200400" cy="1234440"/>
-          </a:xfrm>
-          <a:prstGeom prst="rect">
-            <a:avLst/>
-          </a:prstGeom>
-          <a:solidFill>
-            <a:srgbClr val="132038"/>
-          </a:solidFill>
-          <a:ln w="12700">
-            <a:solidFill>
-              <a:srgbClr val="1E3558"/>
-            </a:solidFill>
-            <a:prstDash val="solid"/>
-          </a:ln>
-          <a:effectLst>
-            <a:outerShdw blurRad="101600" dist="38100" dir="8100000" algn="bl" rotWithShape="0">
-              <a:srgbClr val="000000">
-                <a:alpha val="20000"/>
-              </a:srgbClr>
-            </a:outerShdw>
-          </a:effectLst>
-        </p:spPr>
-      </p:sp>
-      <p:sp>
-        <p:nvSpPr>
-          <p:cNvPr id="15" name="Shape 12"/>
-          <p:cNvSpPr/>
-          <p:nvPr/>
-        </p:nvSpPr>
-        <p:spPr>
-          <a:xfrm>
-            <a:off x="5669280" y="2286000"/>
-            <a:ext cx="3200400" cy="64008"/>
-          </a:xfrm>
-          <a:prstGeom prst="rect">
-            <a:avLst/>
-          </a:prstGeom>
-          <a:solidFill>
-            <a:srgbClr val="F5A623"/>
-          </a:solidFill>
-          <a:ln w="12700">
-            <a:solidFill>
-              <a:srgbClr val="F5A623"/>
-            </a:solidFill>
-            <a:prstDash val="solid"/>
-          </a:ln>
-        </p:spPr>
-      </p:sp>
-      <p:sp>
-        <p:nvSpPr>
-          <p:cNvPr id="16" name="Text 13"/>
-          <p:cNvSpPr/>
-          <p:nvPr/>
-        </p:nvSpPr>
-        <p:spPr>
-          <a:xfrm>
-            <a:off x="5806440" y="2395728"/>
-            <a:ext cx="2926080" cy="228600"/>
-          </a:xfrm>
-          <a:prstGeom prst="rect">
-            <a:avLst/>
-          </a:prstGeom>
-          <a:noFill/>
-          <a:ln/>
-        </p:spPr>
-        <p:txBody>
-          <a:bodyPr wrap="square" lIns="0" tIns="0" rIns="0" bIns="0" rtlCol="0" anchor="ctr"/>
-          <a:lstStyle/>
-          <a:p>
-            <a:pPr marL="0" indent="0">
-              <a:buNone/>
-            </a:pPr>
-            <a:r>
-              <a:rPr lang="en-US" sz="850" b="1" kern="0" spc="200" dirty="0">
-                <a:solidFill>
-                  <a:srgbClr val="8B9AB5"/>
-                </a:solidFill>
-                <a:latin typeface="Calibri" pitchFamily="34" charset="0"/>
-                <a:ea typeface="Calibri" pitchFamily="34" charset="-122"/>
-                <a:cs typeface="Calibri" pitchFamily="34" charset="-120"/>
-              </a:rPr>
-              <a:t>LOYALTY REVENUE</a:t>
-            </a:r>
-            <a:endParaRPr lang="en-US" sz="850" dirty="0"/>
-          </a:p>
-        </p:txBody>
-      </p:sp>
-      <p:sp>
-        <p:nvSpPr>
-          <p:cNvPr id="17" name="Text 14"/>
-          <p:cNvSpPr/>
-          <p:nvPr/>
-        </p:nvSpPr>
-        <p:spPr>
-          <a:xfrm>
-            <a:off x="5806440" y="2633472"/>
-            <a:ext cx="2926080" cy="548640"/>
-          </a:xfrm>
-          <a:prstGeom prst="rect">
-            <a:avLst/>
-          </a:prstGeom>
-          <a:noFill/>
-          <a:ln/>
-        </p:spPr>
-        <p:txBody>
-          <a:bodyPr wrap="square" lIns="0" tIns="0" rIns="0" bIns="0" rtlCol="0" anchor="ctr"/>
-          <a:lstStyle/>
-          <a:p>
-            <a:pPr marL="0" indent="0">
-              <a:buNone/>
-            </a:pPr>
-            <a:r>
-              <a:rPr lang="en-US" sz="2800" b="1" dirty="0">
-                <a:solidFill>
-                  <a:srgbClr val="F5A623"/>
-                </a:solidFill>
-                <a:latin typeface="Calibri" pitchFamily="34" charset="0"/>
-                <a:ea typeface="Calibri" pitchFamily="34" charset="-122"/>
-                <a:cs typeface="Calibri" pitchFamily="34" charset="-120"/>
-              </a:rPr>
-              <a:t>$13.6M</a:t>
-            </a:r>
-            <a:endParaRPr lang="en-US" sz="2800" dirty="0"/>
-          </a:p>
-        </p:txBody>
-      </p:sp>
-      <p:sp>
-        <p:nvSpPr>
-          <p:cNvPr id="18" name="Text 15"/>
-          <p:cNvSpPr/>
-          <p:nvPr/>
-        </p:nvSpPr>
-        <p:spPr>
-          <a:xfrm>
-            <a:off x="5806440" y="3182112"/>
-            <a:ext cx="2926080" cy="228600"/>
-          </a:xfrm>
-          <a:prstGeom prst="rect">
-            <a:avLst/>
-          </a:prstGeom>
-          <a:noFill/>
-          <a:ln/>
-        </p:spPr>
-        <p:txBody>
-          <a:bodyPr wrap="square" lIns="0" tIns="0" rIns="0" bIns="0" rtlCol="0" anchor="ctr"/>
-          <a:lstStyle/>
-          <a:p>
-            <a:pPr marL="0" indent="0">
-              <a:buNone/>
-            </a:pPr>
-            <a:r>
-              <a:rPr lang="en-US" sz="900" dirty="0">
-                <a:solidFill>
-                  <a:srgbClr val="8B9AB5"/>
-                </a:solidFill>
-                <a:latin typeface="Calibri" pitchFamily="34" charset="0"/>
-                <a:ea typeface="Calibri" pitchFamily="34" charset="-122"/>
-                <a:cs typeface="Calibri" pitchFamily="34" charset="-120"/>
-              </a:rPr>
-              <a:t>21.4% of total revenue</a:t>
-            </a:r>
-            <a:endParaRPr lang="en-US" sz="900" dirty="0"/>
-          </a:p>
-        </p:txBody>
-      </p:sp>
-      <p:sp>
-        <p:nvSpPr>
-          <p:cNvPr id="19" name="Shape 16"/>
-          <p:cNvSpPr/>
-          <p:nvPr/>
-        </p:nvSpPr>
-        <p:spPr>
-          <a:xfrm>
-            <a:off x="5669280" y="3520440"/>
-            <a:ext cx="3200400" cy="1234440"/>
-          </a:xfrm>
-          <a:prstGeom prst="rect">
-            <a:avLst/>
-          </a:prstGeom>
-          <a:solidFill>
-            <a:srgbClr val="132038"/>
-          </a:solidFill>
-          <a:ln w="12700">
-            <a:solidFill>
-              <a:srgbClr val="1E3558"/>
-            </a:solidFill>
-            <a:prstDash val="solid"/>
-          </a:ln>
-          <a:effectLst>
-            <a:outerShdw blurRad="101600" dist="38100" dir="8100000" algn="bl" rotWithShape="0">
-              <a:srgbClr val="000000">
-                <a:alpha val="20000"/>
-              </a:srgbClr>
-            </a:outerShdw>
-          </a:effectLst>
-        </p:spPr>
-      </p:sp>
-      <p:sp>
-        <p:nvSpPr>
-          <p:cNvPr id="20" name="Shape 17"/>
-          <p:cNvSpPr/>
-          <p:nvPr/>
-        </p:nvSpPr>
-        <p:spPr>
-          <a:xfrm>
-            <a:off x="5669280" y="3520440"/>
-            <a:ext cx="3200400" cy="64008"/>
-          </a:xfrm>
-          <a:prstGeom prst="rect">
-            <a:avLst/>
-          </a:prstGeom>
-          <a:solidFill>
-            <a:srgbClr val="2ECC97"/>
-          </a:solidFill>
-          <a:ln w="12700">
-            <a:solidFill>
-              <a:srgbClr val="2ECC97"/>
-            </a:solidFill>
-            <a:prstDash val="solid"/>
-          </a:ln>
-        </p:spPr>
-      </p:sp>
-      <p:sp>
-        <p:nvSpPr>
-          <p:cNvPr id="21" name="Text 18"/>
-          <p:cNvSpPr/>
-          <p:nvPr/>
-        </p:nvSpPr>
-        <p:spPr>
-          <a:xfrm>
-            <a:off x="5806440" y="3630168"/>
-            <a:ext cx="2926080" cy="228600"/>
-          </a:xfrm>
-          <a:prstGeom prst="rect">
-            <a:avLst/>
-          </a:prstGeom>
-          <a:noFill/>
-          <a:ln/>
-        </p:spPr>
-        <p:txBody>
-          <a:bodyPr wrap="square" lIns="0" tIns="0" rIns="0" bIns="0" rtlCol="0" anchor="ctr"/>
-          <a:lstStyle/>
-          <a:p>
-            <a:pPr marL="0" indent="0">
-              <a:buNone/>
-            </a:pPr>
-            <a:r>
-              <a:rPr lang="en-US" sz="850" b="1" kern="0" spc="200" dirty="0">
-                <a:solidFill>
-                  <a:srgbClr val="8B9AB5"/>
-                </a:solidFill>
-                <a:latin typeface="Calibri" pitchFamily="34" charset="0"/>
-                <a:ea typeface="Calibri" pitchFamily="34" charset="-122"/>
-                <a:cs typeface="Calibri" pitchFamily="34" charset="-120"/>
-              </a:rPr>
-              <a:t>TOP BUYER AGE GROUP</a:t>
-            </a:r>
-            <a:endParaRPr lang="en-US" sz="850" dirty="0"/>
-          </a:p>
-        </p:txBody>
-      </p:sp>
-      <p:sp>
-        <p:nvSpPr>
-          <p:cNvPr id="22" name="Text 19"/>
-          <p:cNvSpPr/>
-          <p:nvPr/>
-        </p:nvSpPr>
-        <p:spPr>
-          <a:xfrm>
-            <a:off x="5806440" y="3867912"/>
-            <a:ext cx="2926080" cy="548640"/>
-          </a:xfrm>
-          <a:prstGeom prst="rect">
-            <a:avLst/>
-          </a:prstGeom>
-          <a:noFill/>
-          <a:ln/>
-        </p:spPr>
-        <p:txBody>
-          <a:bodyPr wrap="square" lIns="0" tIns="0" rIns="0" bIns="0" rtlCol="0" anchor="ctr"/>
-          <a:lstStyle/>
-          <a:p>
-            <a:pPr marL="0" indent="0">
-              <a:buNone/>
-            </a:pPr>
-            <a:r>
-              <a:rPr lang="en-US" sz="2800" b="1" dirty="0">
-                <a:solidFill>
-                  <a:srgbClr val="2ECC97"/>
-                </a:solidFill>
-                <a:latin typeface="Calibri" pitchFamily="34" charset="0"/>
-                <a:ea typeface="Calibri" pitchFamily="34" charset="-122"/>
-                <a:cs typeface="Calibri" pitchFamily="34" charset="-120"/>
-              </a:rPr>
-              <a:t>65+</a:t>
-            </a:r>
-            <a:endParaRPr lang="en-US" sz="2800" dirty="0"/>
-          </a:p>
-        </p:txBody>
-      </p:sp>
-      <p:sp>
-        <p:nvSpPr>
-          <p:cNvPr id="23" name="Text 20"/>
-          <p:cNvSpPr/>
-          <p:nvPr/>
-        </p:nvSpPr>
-        <p:spPr>
-          <a:xfrm>
-            <a:off x="5806440" y="4416552"/>
-            <a:ext cx="2926080" cy="228600"/>
-          </a:xfrm>
-          <a:prstGeom prst="rect">
-            <a:avLst/>
-          </a:prstGeom>
-          <a:noFill/>
-          <a:ln/>
-        </p:spPr>
-        <p:txBody>
-          <a:bodyPr wrap="square" lIns="0" tIns="0" rIns="0" bIns="0" rtlCol="0" anchor="ctr"/>
-          <a:lstStyle/>
-          <a:p>
-            <a:pPr marL="0" indent="0">
-              <a:buNone/>
-            </a:pPr>
-            <a:r>
-              <a:rPr lang="en-US" sz="900" dirty="0">
-                <a:solidFill>
-                  <a:srgbClr val="8B9AB5"/>
-                </a:solidFill>
-                <a:latin typeface="Calibri" pitchFamily="34" charset="0"/>
-                <a:ea typeface="Calibri" pitchFamily="34" charset="-122"/>
-                <a:cs typeface="Calibri" pitchFamily="34" charset="-120"/>
-              </a:rPr>
-              <a:t>4,711 customers (23.6%)</a:t>
-            </a:r>
-            <a:endParaRPr lang="en-US" sz="900" dirty="0"/>
-          </a:p>
-        </p:txBody>
-      </p:sp>
-    </p:spTree>
-  </p:cSld>
-  <p:clrMapOvr>
-    <a:masterClrMapping/>
-  </p:clrMapOvr>
-</p:sld>
-</file>
-
 <file path=ppt/theme/theme1.xml><?xml version="1.0" encoding="utf-8"?>
 <a:theme xmlns:a="http://schemas.openxmlformats.org/drawingml/2006/main" name="Office Theme">
   <a:themeElements>
-    <a:clrScheme name="Office">
+    <a:clrScheme name="Office Theme">
       <a:dk1>
         <a:sysClr val="windowText" lastClr="000000"/>
       </a:dk1>
@@ -15290,22 +17898,22 @@
         <a:srgbClr val="E7E6E6"/>
       </a:lt2>
       <a:accent1>
-        <a:srgbClr val="4472C4"/>
+        <a:srgbClr val="29AF8C"/>
       </a:accent1>
       <a:accent2>
-        <a:srgbClr val="ED7D31"/>
+        <a:srgbClr val="97BE49"/>
       </a:accent2>
       <a:accent3>
-        <a:srgbClr val="A5A5A5"/>
+        <a:srgbClr val="3D9CCC"/>
       </a:accent3>
       <a:accent4>
-        <a:srgbClr val="FFC000"/>
+        <a:srgbClr val="7C60C6"/>
       </a:accent4>
       <a:accent5>
-        <a:srgbClr val="5B9BD5"/>
+        <a:srgbClr val="C9492C"/>
       </a:accent5>
       <a:accent6>
-        <a:srgbClr val="70AD47"/>
+        <a:srgbClr val="D58C2E"/>
       </a:accent6>
       <a:hlink>
         <a:srgbClr val="0563C1"/>
@@ -15314,7 +17922,7 @@
         <a:srgbClr val="954F72"/>
       </a:folHlink>
     </a:clrScheme>
-    <a:fontScheme name="Office">
+    <a:fontScheme name="Office Theme">
       <a:majorFont>
         <a:latin typeface="Calibri Light" panose="020F0302020204030204"/>
         <a:ea typeface=""/>
@@ -15349,23 +17957,6 @@
         <a:font script="Viet" typeface="Times New Roman"/>
         <a:font script="Uigh" typeface="Microsoft Uighur"/>
         <a:font script="Geor" typeface="Sylfaen"/>
-        <a:font script="Armn" typeface="Arial"/>
-        <a:font script="Bugi" typeface="Leelawadee UI"/>
-        <a:font script="Bopo" typeface="Microsoft JhengHei"/>
-        <a:font script="Java" typeface="Javanese Text"/>
-        <a:font script="Lisu" typeface="Segoe UI"/>
-        <a:font script="Mymr" typeface="Myanmar Text"/>
-        <a:font script="Nkoo" typeface="Ebrima"/>
-        <a:font script="Olck" typeface="Nirmala UI"/>
-        <a:font script="Osma" typeface="Ebrima"/>
-        <a:font script="Phag" typeface="Phagspa"/>
-        <a:font script="Syrn" typeface="Estrangelo Edessa"/>
-        <a:font script="Syrj" typeface="Estrangelo Edessa"/>
-        <a:font script="Syre" typeface="Estrangelo Edessa"/>
-        <a:font script="Sora" typeface="Nirmala UI"/>
-        <a:font script="Tale" typeface="Microsoft Tai Le"/>
-        <a:font script="Talu" typeface="Microsoft New Tai Lue"/>
-        <a:font script="Tfng" typeface="Ebrima"/>
       </a:majorFont>
       <a:minorFont>
         <a:latin typeface="Calibri" panose="020F0502020204030204"/>
@@ -15401,26 +17992,9 @@
         <a:font script="Viet" typeface="Arial"/>
         <a:font script="Uigh" typeface="Microsoft Uighur"/>
         <a:font script="Geor" typeface="Sylfaen"/>
-        <a:font script="Armn" typeface="Arial"/>
-        <a:font script="Bugi" typeface="Leelawadee UI"/>
-        <a:font script="Bopo" typeface="Microsoft JhengHei"/>
-        <a:font script="Java" typeface="Javanese Text"/>
-        <a:font script="Lisu" typeface="Segoe UI"/>
-        <a:font script="Mymr" typeface="Myanmar Text"/>
-        <a:font script="Nkoo" typeface="Ebrima"/>
-        <a:font script="Olck" typeface="Nirmala UI"/>
-        <a:font script="Osma" typeface="Ebrima"/>
-        <a:font script="Phag" typeface="Phagspa"/>
-        <a:font script="Syrn" typeface="Estrangelo Edessa"/>
-        <a:font script="Syrj" typeface="Estrangelo Edessa"/>
-        <a:font script="Syre" typeface="Estrangelo Edessa"/>
-        <a:font script="Sora" typeface="Nirmala UI"/>
-        <a:font script="Tale" typeface="Microsoft Tai Le"/>
-        <a:font script="Talu" typeface="Microsoft New Tai Lue"/>
-        <a:font script="Tfng" typeface="Ebrima"/>
       </a:minorFont>
     </a:fontScheme>
-    <a:fmtScheme name="Office">
+    <a:fmtScheme name="Office Theme">
       <a:fillStyleLst>
         <a:solidFill>
           <a:schemeClr val="phClr"/>
@@ -15562,7 +18136,7 @@
   <a:extraClrSchemeLst/>
   <a:extLst>
     <a:ext uri="{05A4C25C-085E-4340-85A3-A5531E510DB2}">
-      <thm15:themeFamily xmlns:thm15="http://schemas.microsoft.com/office/thememl/2012/main" name="Office Theme" id="{62F939B6-93AF-4DB8-9C6B-D6C7DFDC589F}" vid="{4A3C46E8-61CC-4603-A589-7422A47A8E4A}"/>
+      <thm15:themeFamily xmlns:thm15="http://schemas.microsoft.com/office/thememl/2012/main" name="Office Theme" id="{62F939B6-93AF-4DB8-9C6B-D6C7DFDC589F}" vid="{3E4F19A7-A959-40BB-972C-4880BAF8EB09}"/>
     </a:ext>
   </a:extLst>
 </a:theme>
